--- a/static/files/Procedural-Writing-Workshop.pptx
+++ b/static/files/Procedural-Writing-Workshop.pptx
@@ -4,6 +4,9 @@
   <p:sldMasterIdLst>
     <p:sldMasterId id="2147483648" r:id="rId1"/>
   </p:sldMasterIdLst>
+  <p:notesMasterIdLst>
+    <p:notesMasterId r:id="rId16"/>
+  </p:notesMasterIdLst>
   <p:sldIdLst>
     <p:sldId id="256" r:id="rId2"/>
     <p:sldId id="257" r:id="rId3"/>
@@ -20,10 +23,7 @@
     <p:sldId id="268" r:id="rId14"/>
     <p:sldId id="269" r:id="rId15"/>
   </p:sldIdLst>
-  <p:notesMasterIdLst>
-    <p:notesMasterId r:id="rId16"/>
-  </p:notesMasterIdLst>
-  <p:sldSz cx="9144000" cy="5143500"/>
+  <p:sldSz cx="9144000" cy="5143500" type="screen16x9"/>
   <p:notesSz cx="5143500" cy="9144000"/>
   <p:defaultTextStyle>
     <a:lvl1pPr marL="0" algn="l" defTabSz="914400" rtl="0" eaLnBrk="1" latinLnBrk="0" hangingPunct="1">
@@ -117,6 +117,11 @@
       </a:defRPr>
     </a:lvl9pPr>
   </p:defaultTextStyle>
+  <p:extLst>
+    <p:ext uri="{EFAFB233-063F-42B5-8137-9DF3F51BA10A}">
+      <p15:sldGuideLst xmlns:p15="http://schemas.microsoft.com/office/powerpoint/2012/main"/>
+    </p:ext>
+  </p:extLst>
 </p:presentation>
 </file>
 
@@ -142,234 +147,10 @@
           <a:chExt cx="0" cy="0"/>
         </a:xfrm>
       </p:grpSpPr>
-      <p:sp>
-        <p:nvSpPr>
-          <p:cNvPr id="2" name="Header Placeholder 1"/>
-          <p:cNvSpPr>
-            <a:spLocks noGrp="1"/>
-          </p:cNvSpPr>
-          <p:nvPr>
-            <p:ph type="hdr" sz="quarter"/>
-          </p:nvPr>
-        </p:nvSpPr>
-        <p:spPr>
-          <a:xfrm>
-            <a:off x="0" y="0"/>
-            <a:ext cx="2971800" cy="458788"/>
-          </a:xfrm>
-          <a:prstGeom prst="rect">
-            <a:avLst/>
-          </a:prstGeom>
-        </p:spPr>
-        <p:txBody>
-          <a:bodyPr vert="horz" lIns="91440" tIns="45720" rIns="91440" bIns="45720" rtlCol="0"/>
-          <a:lstStyle>
-            <a:lvl1pPr algn="l">
-              <a:defRPr sz="1200"/>
-            </a:lvl1pPr>
-          </a:lstStyle>
-          <a:p>
-            <a:endParaRPr lang="en-US"/>
-          </a:p>
-        </p:txBody>
-      </p:sp>
-      <p:sp>
-        <p:nvSpPr>
-          <p:cNvPr id="3" name="Date Placeholder 2"/>
-          <p:cNvSpPr>
-            <a:spLocks noGrp="1"/>
-          </p:cNvSpPr>
-          <p:nvPr>
-            <p:ph type="dt" idx="1"/>
-          </p:nvPr>
-        </p:nvSpPr>
-        <p:spPr>
-          <a:xfrm>
-            <a:off x="3884613" y="0"/>
-            <a:ext cx="2971800" cy="458788"/>
-          </a:xfrm>
-          <a:prstGeom prst="rect">
-            <a:avLst/>
-          </a:prstGeom>
-        </p:spPr>
-        <p:txBody>
-          <a:bodyPr vert="horz" lIns="91440" tIns="45720" rIns="91440" bIns="45720" rtlCol="0"/>
-          <a:lstStyle>
-            <a:lvl1pPr algn="r">
-              <a:defRPr sz="1200"/>
-            </a:lvl1pPr>
-          </a:lstStyle>
-          <a:p>
-            <a:fld id="{5282F153-3F37-0F45-9E97-73ACFA13230C}" type="datetimeFigureOut">
-              <a:rPr lang="en-US"/>
-              <a:t>7/23/19</a:t>
-            </a:fld>
-            <a:endParaRPr lang="en-US"/>
-          </a:p>
-        </p:txBody>
-      </p:sp>
-      <p:sp>
-        <p:nvSpPr>
-          <p:cNvPr id="4" name="Slide Image Placeholder 3"/>
-          <p:cNvSpPr>
-            <a:spLocks noGrp="1" noRot="1" noChangeAspect="1"/>
-          </p:cNvSpPr>
-          <p:nvPr>
-            <p:ph type="sldImg" idx="2"/>
-          </p:nvPr>
-        </p:nvSpPr>
-        <p:spPr>
-          <a:xfrm>
-            <a:off x="685800" y="1143000"/>
-            <a:ext cx="5486400" cy="3086100"/>
-          </a:xfrm>
-          <a:prstGeom prst="rect">
-            <a:avLst/>
-          </a:prstGeom>
-          <a:noFill/>
-          <a:ln w="12700">
-            <a:solidFill>
-              <a:prstClr val="black"/>
-            </a:solidFill>
-          </a:ln>
-        </p:spPr>
-        <p:txBody>
-          <a:bodyPr vert="horz" lIns="91440" tIns="45720" rIns="91440" bIns="45720" rtlCol="0" anchor="ctr"/>
-          <a:lstStyle/>
-          <a:p>
-            <a:endParaRPr lang="en-US"/>
-          </a:p>
-        </p:txBody>
-      </p:sp>
-      <p:sp>
-        <p:nvSpPr>
-          <p:cNvPr id="5" name="Notes Placeholder 4"/>
-          <p:cNvSpPr>
-            <a:spLocks noGrp="1"/>
-          </p:cNvSpPr>
-          <p:nvPr>
-            <p:ph type="body" sz="quarter" idx="3"/>
-          </p:nvPr>
-        </p:nvSpPr>
-        <p:spPr>
-          <a:xfrm>
-            <a:off x="685800" y="4400550"/>
-            <a:ext cx="5486400" cy="3600450"/>
-          </a:xfrm>
-          <a:prstGeom prst="rect">
-            <a:avLst/>
-          </a:prstGeom>
-        </p:spPr>
-        <p:txBody>
-          <a:bodyPr vert="horz" lIns="91440" tIns="45720" rIns="91440" bIns="45720" rtlCol="0"/>
-          <a:lstStyle/>
-          <a:p>
-            <a:pPr lvl="0"/>
-            <a:r>
-              <a:rPr lang="en-US"/>
-              <a:t>Click to edit Master text styles</a:t>
-            </a:r>
-          </a:p>
-          <a:p>
-            <a:pPr lvl="1"/>
-            <a:r>
-              <a:rPr lang="en-US"/>
-              <a:t>Second level</a:t>
-            </a:r>
-          </a:p>
-          <a:p>
-            <a:pPr lvl="2"/>
-            <a:r>
-              <a:rPr lang="en-US"/>
-              <a:t>Third level</a:t>
-            </a:r>
-          </a:p>
-          <a:p>
-            <a:pPr lvl="3"/>
-            <a:r>
-              <a:rPr lang="en-US"/>
-              <a:t>Fourth level</a:t>
-            </a:r>
-          </a:p>
-          <a:p>
-            <a:pPr lvl="4"/>
-            <a:r>
-              <a:rPr lang="en-US"/>
-              <a:t>Fifth level</a:t>
-            </a:r>
-          </a:p>
-        </p:txBody>
-      </p:sp>
-      <p:sp>
-        <p:nvSpPr>
-          <p:cNvPr id="6" name="Footer Placeholder 5"/>
-          <p:cNvSpPr>
-            <a:spLocks noGrp="1"/>
-          </p:cNvSpPr>
-          <p:nvPr>
-            <p:ph type="ftr" sz="quarter" idx="4"/>
-          </p:nvPr>
-        </p:nvSpPr>
-        <p:spPr>
-          <a:xfrm>
-            <a:off x="0" y="8685213"/>
-            <a:ext cx="2971800" cy="458787"/>
-          </a:xfrm>
-          <a:prstGeom prst="rect">
-            <a:avLst/>
-          </a:prstGeom>
-        </p:spPr>
-        <p:txBody>
-          <a:bodyPr vert="horz" lIns="91440" tIns="45720" rIns="91440" bIns="45720" rtlCol="0" anchor="b"/>
-          <a:lstStyle>
-            <a:lvl1pPr algn="l">
-              <a:defRPr sz="1200"/>
-            </a:lvl1pPr>
-          </a:lstStyle>
-          <a:p>
-            <a:endParaRPr lang="en-US"/>
-          </a:p>
-        </p:txBody>
-      </p:sp>
-      <p:sp>
-        <p:nvSpPr>
-          <p:cNvPr id="7" name="Slide Number Placeholder 6"/>
-          <p:cNvSpPr>
-            <a:spLocks noGrp="1"/>
-          </p:cNvSpPr>
-          <p:nvPr>
-            <p:ph type="sldNum" sz="quarter" idx="5"/>
-          </p:nvPr>
-        </p:nvSpPr>
-        <p:spPr>
-          <a:xfrm>
-            <a:off x="3884613" y="8685213"/>
-            <a:ext cx="2971800" cy="458787"/>
-          </a:xfrm>
-          <a:prstGeom prst="rect">
-            <a:avLst/>
-          </a:prstGeom>
-        </p:spPr>
-        <p:txBody>
-          <a:bodyPr vert="horz" lIns="91440" tIns="45720" rIns="91440" bIns="45720" rtlCol="0" anchor="b"/>
-          <a:lstStyle>
-            <a:lvl1pPr algn="r">
-              <a:defRPr sz="1200"/>
-            </a:lvl1pPr>
-          </a:lstStyle>
-          <a:p>
-            <a:fld id="{CE5E9CC1-C706-0F49-92D6-E571CC5EEA8F}" type="slidenum">
-              <a:rPr lang="en-US"/>
-              <a:t>‹#›</a:t>
-            </a:fld>
-            <a:endParaRPr lang="en-US"/>
-          </a:p>
-        </p:txBody>
-      </p:sp>
     </p:spTree>
     <p:extLst>
       <p:ext uri="{BB962C8B-B14F-4D97-AF65-F5344CB8AC3E}">
-        <p14:creationId xmlns:p14="http://schemas.microsoft.com/office/powerpoint/2010/main" val="1024086991"/>
+        <p14:creationId xmlns:p14="http://schemas.microsoft.com/office/powerpoint/2010/main" val="1563073453"/>
       </p:ext>
     </p:extLst>
   </p:cSld>
@@ -513,10 +294,6 @@
           <a:bodyPr/>
           <a:lstStyle/>
           <a:p>
-            <a:r>
-              <a:rPr lang="en-US" dirty="0"/>
-              <a:t/>
-            </a:r>
             <a:endParaRPr lang="en-US" dirty="0"/>
           </a:p>
         </p:txBody>
@@ -601,10 +378,6 @@
           <a:bodyPr/>
           <a:lstStyle/>
           <a:p>
-            <a:r>
-              <a:rPr lang="en-US" dirty="0"/>
-              <a:t/>
-            </a:r>
             <a:endParaRPr lang="en-US" dirty="0"/>
           </a:p>
         </p:txBody>
@@ -689,10 +462,6 @@
           <a:bodyPr/>
           <a:lstStyle/>
           <a:p>
-            <a:r>
-              <a:rPr lang="en-US" dirty="0"/>
-              <a:t/>
-            </a:r>
             <a:endParaRPr lang="en-US" dirty="0"/>
           </a:p>
         </p:txBody>
@@ -777,10 +546,6 @@
           <a:bodyPr/>
           <a:lstStyle/>
           <a:p>
-            <a:r>
-              <a:rPr lang="en-US" dirty="0"/>
-              <a:t/>
-            </a:r>
             <a:endParaRPr lang="en-US" dirty="0"/>
           </a:p>
         </p:txBody>
@@ -865,10 +630,6 @@
           <a:bodyPr/>
           <a:lstStyle/>
           <a:p>
-            <a:r>
-              <a:rPr lang="en-US" dirty="0"/>
-              <a:t/>
-            </a:r>
             <a:endParaRPr lang="en-US" dirty="0"/>
           </a:p>
         </p:txBody>
@@ -953,10 +714,6 @@
           <a:bodyPr/>
           <a:lstStyle/>
           <a:p>
-            <a:r>
-              <a:rPr lang="en-US" dirty="0"/>
-              <a:t/>
-            </a:r>
             <a:endParaRPr lang="en-US" dirty="0"/>
           </a:p>
         </p:txBody>
@@ -1041,10 +798,6 @@
           <a:bodyPr/>
           <a:lstStyle/>
           <a:p>
-            <a:r>
-              <a:rPr lang="en-US" dirty="0"/>
-              <a:t/>
-            </a:r>
             <a:endParaRPr lang="en-US" dirty="0"/>
           </a:p>
         </p:txBody>
@@ -1129,10 +882,6 @@
           <a:bodyPr/>
           <a:lstStyle/>
           <a:p>
-            <a:r>
-              <a:rPr lang="en-US" dirty="0"/>
-              <a:t/>
-            </a:r>
             <a:endParaRPr lang="en-US" dirty="0"/>
           </a:p>
         </p:txBody>
@@ -1217,10 +966,6 @@
           <a:bodyPr/>
           <a:lstStyle/>
           <a:p>
-            <a:r>
-              <a:rPr lang="en-US" dirty="0"/>
-              <a:t/>
-            </a:r>
             <a:endParaRPr lang="en-US" dirty="0"/>
           </a:p>
         </p:txBody>
@@ -1305,10 +1050,6 @@
           <a:bodyPr/>
           <a:lstStyle/>
           <a:p>
-            <a:r>
-              <a:rPr lang="en-US" dirty="0"/>
-              <a:t/>
-            </a:r>
             <a:endParaRPr lang="en-US" dirty="0"/>
           </a:p>
         </p:txBody>
@@ -1393,10 +1134,6 @@
           <a:bodyPr/>
           <a:lstStyle/>
           <a:p>
-            <a:r>
-              <a:rPr lang="en-US" dirty="0"/>
-              <a:t/>
-            </a:r>
             <a:endParaRPr lang="en-US" dirty="0"/>
           </a:p>
         </p:txBody>
@@ -1481,10 +1218,6 @@
           <a:bodyPr/>
           <a:lstStyle/>
           <a:p>
-            <a:r>
-              <a:rPr lang="en-US" dirty="0"/>
-              <a:t/>
-            </a:r>
             <a:endParaRPr lang="en-US" dirty="0"/>
           </a:p>
         </p:txBody>
@@ -1569,10 +1302,6 @@
           <a:bodyPr/>
           <a:lstStyle/>
           <a:p>
-            <a:r>
-              <a:rPr lang="en-US" dirty="0"/>
-              <a:t/>
-            </a:r>
             <a:endParaRPr lang="en-US" dirty="0"/>
           </a:p>
         </p:txBody>
@@ -1657,10 +1386,6 @@
           <a:bodyPr/>
           <a:lstStyle/>
           <a:p>
-            <a:r>
-              <a:rPr lang="en-US" dirty="0"/>
-              <a:t/>
-            </a:r>
             <a:endParaRPr lang="en-US" dirty="0"/>
           </a:p>
         </p:txBody>
@@ -1734,6 +1459,11 @@
 <file path=ppt/slideMasters/slideMaster1.xml><?xml version="1.0" encoding="utf-8"?>
 <p:sldMaster xmlns:a="http://schemas.openxmlformats.org/drawingml/2006/main" xmlns:r="http://schemas.openxmlformats.org/officeDocument/2006/relationships" xmlns:p="http://schemas.openxmlformats.org/presentationml/2006/main">
   <p:cSld>
+    <p:bg>
+      <p:bgRef idx="1001">
+        <a:schemeClr val="bg1"/>
+      </p:bgRef>
+    </p:bg>
     <p:spTree>
       <p:nvGrpSpPr>
         <p:cNvPr id="1" name=""/>
@@ -2016,6 +1746,7 @@
         <a:solidFill>
           <a:srgbClr val="12181A"/>
         </a:solidFill>
+        <a:effectLst/>
       </p:bgPr>
     </p:bg>
     <p:spTree>
@@ -2051,6 +1782,13 @@
           </a:solidFill>
           <a:ln/>
         </p:spPr>
+        <p:txBody>
+          <a:bodyPr/>
+          <a:lstStyle/>
+          <a:p>
+            <a:endParaRPr lang="en-US"/>
+          </a:p>
+        </p:txBody>
       </p:sp>
       <p:sp>
         <p:nvSpPr>
@@ -2073,11 +1811,11 @@
           <a:bodyPr wrap="square" lIns="0" tIns="0" rIns="0" bIns="0" rtlCol="0" anchor="ctr"/>
           <a:lstStyle/>
           <a:p>
-            <a:pPr indent="0" marL="0">
+            <a:pPr marL="0" indent="0">
               <a:buNone/>
             </a:pPr>
             <a:r>
-              <a:rPr lang="en-US" sz="1200" spc="200" kern="0" dirty="0">
+              <a:rPr lang="en-US" sz="1200" kern="0" spc="200" dirty="0">
                 <a:solidFill>
                   <a:srgbClr val="085951"/>
                 </a:solidFill>
@@ -2112,7 +1850,7 @@
           <a:bodyPr wrap="square" lIns="0" tIns="0" rIns="0" bIns="0" rtlCol="0" anchor="t"/>
           <a:lstStyle/>
           <a:p>
-            <a:pPr algn="l" indent="0" marL="0">
+            <a:pPr marL="0" indent="0" algn="l">
               <a:lnSpc>
                 <a:spcPct val="105000"/>
               </a:lnSpc>
@@ -2127,7 +1865,7 @@
                 <a:ea typeface="Cambria" pitchFamily="34" charset="-122"/>
                 <a:cs typeface="Cambria" pitchFamily="34" charset="-120"/>
               </a:rPr>
-              <a:t>Procedural Writing</a:t>
+              <a:t>Writing Procedures</a:t>
             </a:r>
             <a:endParaRPr lang="en-US" sz="4000" dirty="0"/>
           </a:p>
@@ -2154,7 +1892,7 @@
           <a:bodyPr wrap="square" lIns="0" tIns="0" rIns="0" bIns="0" rtlCol="0" anchor="t"/>
           <a:lstStyle/>
           <a:p>
-            <a:pPr algn="l" indent="0" marL="0">
+            <a:pPr marL="0" indent="0" algn="l">
               <a:buNone/>
             </a:pPr>
             <a:r>
@@ -2193,7 +1931,7 @@
           <a:bodyPr wrap="square" lIns="0" tIns="0" rIns="0" bIns="0" rtlCol="0" anchor="ctr"/>
           <a:lstStyle/>
           <a:p>
-            <a:pPr indent="0" marL="0">
+            <a:pPr marL="0" indent="0">
               <a:buNone/>
             </a:pPr>
             <a:r>
@@ -2227,6 +1965,7 @@
         <a:solidFill>
           <a:srgbClr val="F4F6F5"/>
         </a:solidFill>
+        <a:effectLst/>
       </p:bgPr>
     </p:bg>
     <p:spTree>
@@ -2264,11 +2003,11 @@
           <a:bodyPr wrap="square" lIns="0" tIns="0" rIns="0" bIns="0" rtlCol="0" anchor="ctr"/>
           <a:lstStyle/>
           <a:p>
-            <a:pPr indent="0" marL="0">
+            <a:pPr marL="0" indent="0">
               <a:buNone/>
             </a:pPr>
             <a:r>
-              <a:rPr lang="en-US" sz="900" spc="100" kern="0" dirty="0">
+              <a:rPr lang="en-US" sz="900" kern="0" spc="100" dirty="0">
                 <a:solidFill>
                   <a:srgbClr val="4B5559"/>
                 </a:solidFill>
@@ -2303,7 +2042,7 @@
           <a:bodyPr wrap="square" lIns="0" tIns="0" rIns="0" bIns="0" rtlCol="0" anchor="ctr"/>
           <a:lstStyle/>
           <a:p>
-            <a:pPr algn="r" indent="0" marL="0">
+            <a:pPr marL="0" indent="0" algn="r">
               <a:buNone/>
             </a:pPr>
             <a:r>
@@ -2342,11 +2081,11 @@
           <a:bodyPr wrap="square" lIns="0" tIns="0" rIns="0" bIns="0" rtlCol="0" anchor="ctr"/>
           <a:lstStyle/>
           <a:p>
-            <a:pPr indent="0" marL="0">
+            <a:pPr marL="0" indent="0">
               <a:buNone/>
             </a:pPr>
             <a:r>
-              <a:rPr lang="en-US" sz="1050" spc="150" kern="0" dirty="0">
+              <a:rPr lang="en-US" sz="1050" kern="0" spc="150" dirty="0">
                 <a:solidFill>
                   <a:srgbClr val="0B6E63"/>
                 </a:solidFill>
@@ -2381,7 +2120,7 @@
           <a:bodyPr wrap="square" lIns="0" tIns="0" rIns="0" bIns="0" rtlCol="0" anchor="t"/>
           <a:lstStyle/>
           <a:p>
-            <a:pPr algn="l" indent="0" marL="0">
+            <a:pPr marL="0" indent="0" algn="l">
               <a:buNone/>
             </a:pPr>
             <a:r>
@@ -2420,13 +2159,20 @@
           </a:solidFill>
           <a:ln/>
           <a:effectLst>
-            <a:outerShdw sx="100000" sy="100000" kx="0" ky="0" algn="bl" rotWithShape="0" blurRad="76200" dist="25400" dir="5400000">
+            <a:outerShdw blurRad="76200" dist="25400" dir="5400000" algn="bl" rotWithShape="0">
               <a:srgbClr val="12181A">
                 <a:alpha val="18000"/>
               </a:srgbClr>
             </a:outerShdw>
           </a:effectLst>
         </p:spPr>
+        <p:txBody>
+          <a:bodyPr/>
+          <a:lstStyle/>
+          <a:p>
+            <a:endParaRPr lang="en-US"/>
+          </a:p>
+        </p:txBody>
       </p:sp>
       <p:sp>
         <p:nvSpPr>
@@ -2447,6 +2193,13 @@
           </a:solidFill>
           <a:ln/>
         </p:spPr>
+        <p:txBody>
+          <a:bodyPr/>
+          <a:lstStyle/>
+          <a:p>
+            <a:endParaRPr lang="en-US"/>
+          </a:p>
+        </p:txBody>
       </p:sp>
       <p:sp>
         <p:nvSpPr>
@@ -2469,7 +2222,7 @@
           <a:bodyPr wrap="square" lIns="0" tIns="0" rIns="0" bIns="0" rtlCol="0" anchor="ctr"/>
           <a:lstStyle/>
           <a:p>
-            <a:pPr indent="0" marL="0">
+            <a:pPr marL="0" indent="0">
               <a:buNone/>
             </a:pPr>
             <a:r>
@@ -2616,13 +2369,20 @@
           </a:solidFill>
           <a:ln/>
           <a:effectLst>
-            <a:outerShdw sx="100000" sy="100000" kx="0" ky="0" algn="bl" rotWithShape="0" blurRad="76200" dist="25400" dir="5400000">
+            <a:outerShdw blurRad="76200" dist="25400" dir="5400000" algn="bl" rotWithShape="0">
               <a:srgbClr val="12181A">
                 <a:alpha val="18000"/>
               </a:srgbClr>
             </a:outerShdw>
           </a:effectLst>
         </p:spPr>
+        <p:txBody>
+          <a:bodyPr/>
+          <a:lstStyle/>
+          <a:p>
+            <a:endParaRPr lang="en-US"/>
+          </a:p>
+        </p:txBody>
       </p:sp>
       <p:sp>
         <p:nvSpPr>
@@ -2643,6 +2403,13 @@
           </a:solidFill>
           <a:ln/>
         </p:spPr>
+        <p:txBody>
+          <a:bodyPr/>
+          <a:lstStyle/>
+          <a:p>
+            <a:endParaRPr lang="en-US"/>
+          </a:p>
+        </p:txBody>
       </p:sp>
       <p:sp>
         <p:nvSpPr>
@@ -2665,7 +2432,7 @@
           <a:bodyPr wrap="square" lIns="0" tIns="0" rIns="0" bIns="0" rtlCol="0" anchor="ctr"/>
           <a:lstStyle/>
           <a:p>
-            <a:pPr indent="0" marL="0">
+            <a:pPr marL="0" indent="0">
               <a:buNone/>
             </a:pPr>
             <a:r>
@@ -2765,6 +2532,7 @@
         <a:solidFill>
           <a:srgbClr val="F4F6F5"/>
         </a:solidFill>
+        <a:effectLst/>
       </p:bgPr>
     </p:bg>
     <p:spTree>
@@ -2802,11 +2570,11 @@
           <a:bodyPr wrap="square" lIns="0" tIns="0" rIns="0" bIns="0" rtlCol="0" anchor="ctr"/>
           <a:lstStyle/>
           <a:p>
-            <a:pPr indent="0" marL="0">
+            <a:pPr marL="0" indent="0">
               <a:buNone/>
             </a:pPr>
             <a:r>
-              <a:rPr lang="en-US" sz="900" spc="100" kern="0" dirty="0">
+              <a:rPr lang="en-US" sz="900" kern="0" spc="100" dirty="0">
                 <a:solidFill>
                   <a:srgbClr val="4B5559"/>
                 </a:solidFill>
@@ -2841,7 +2609,7 @@
           <a:bodyPr wrap="square" lIns="0" tIns="0" rIns="0" bIns="0" rtlCol="0" anchor="ctr"/>
           <a:lstStyle/>
           <a:p>
-            <a:pPr algn="r" indent="0" marL="0">
+            <a:pPr marL="0" indent="0" algn="r">
               <a:buNone/>
             </a:pPr>
             <a:r>
@@ -2880,11 +2648,11 @@
           <a:bodyPr wrap="square" lIns="0" tIns="0" rIns="0" bIns="0" rtlCol="0" anchor="ctr"/>
           <a:lstStyle/>
           <a:p>
-            <a:pPr indent="0" marL="0">
+            <a:pPr marL="0" indent="0">
               <a:buNone/>
             </a:pPr>
             <a:r>
-              <a:rPr lang="en-US" sz="1050" spc="150" kern="0" dirty="0">
+              <a:rPr lang="en-US" sz="1050" kern="0" spc="150" dirty="0">
                 <a:solidFill>
                   <a:srgbClr val="0B6E63"/>
                 </a:solidFill>
@@ -2919,7 +2687,7 @@
           <a:bodyPr wrap="square" lIns="0" tIns="0" rIns="0" bIns="0" rtlCol="0" anchor="t"/>
           <a:lstStyle/>
           <a:p>
-            <a:pPr algn="l" indent="0" marL="0">
+            <a:pPr marL="0" indent="0" algn="l">
               <a:buNone/>
             </a:pPr>
             <a:r>
@@ -2958,13 +2726,20 @@
           </a:solidFill>
           <a:ln/>
           <a:effectLst>
-            <a:outerShdw sx="100000" sy="100000" kx="0" ky="0" algn="bl" rotWithShape="0" blurRad="76200" dist="25400" dir="5400000">
+            <a:outerShdw blurRad="76200" dist="25400" dir="5400000" algn="bl" rotWithShape="0">
               <a:srgbClr val="12181A">
                 <a:alpha val="18000"/>
               </a:srgbClr>
             </a:outerShdw>
           </a:effectLst>
         </p:spPr>
+        <p:txBody>
+          <a:bodyPr/>
+          <a:lstStyle/>
+          <a:p>
+            <a:endParaRPr lang="en-US"/>
+          </a:p>
+        </p:txBody>
       </p:sp>
       <p:sp>
         <p:nvSpPr>
@@ -2985,6 +2760,13 @@
           </a:solidFill>
           <a:ln/>
         </p:spPr>
+        <p:txBody>
+          <a:bodyPr/>
+          <a:lstStyle/>
+          <a:p>
+            <a:endParaRPr lang="en-US"/>
+          </a:p>
+        </p:txBody>
       </p:sp>
       <p:sp>
         <p:nvSpPr>
@@ -3007,7 +2789,7 @@
           <a:bodyPr wrap="square" lIns="0" tIns="0" rIns="0" bIns="0" rtlCol="0" anchor="ctr"/>
           <a:lstStyle/>
           <a:p>
-            <a:pPr indent="0" marL="0">
+            <a:pPr marL="0" indent="0">
               <a:buNone/>
             </a:pPr>
             <a:r>
@@ -3154,13 +2936,20 @@
           </a:solidFill>
           <a:ln/>
           <a:effectLst>
-            <a:outerShdw sx="100000" sy="100000" kx="0" ky="0" algn="bl" rotWithShape="0" blurRad="76200" dist="25400" dir="5400000">
+            <a:outerShdw blurRad="76200" dist="25400" dir="5400000" algn="bl" rotWithShape="0">
               <a:srgbClr val="12181A">
                 <a:alpha val="18000"/>
               </a:srgbClr>
             </a:outerShdw>
           </a:effectLst>
         </p:spPr>
+        <p:txBody>
+          <a:bodyPr/>
+          <a:lstStyle/>
+          <a:p>
+            <a:endParaRPr lang="en-US"/>
+          </a:p>
+        </p:txBody>
       </p:sp>
       <p:sp>
         <p:nvSpPr>
@@ -3181,6 +2970,13 @@
           </a:solidFill>
           <a:ln/>
         </p:spPr>
+        <p:txBody>
+          <a:bodyPr/>
+          <a:lstStyle/>
+          <a:p>
+            <a:endParaRPr lang="en-US"/>
+          </a:p>
+        </p:txBody>
       </p:sp>
       <p:sp>
         <p:nvSpPr>
@@ -3203,7 +2999,7 @@
           <a:bodyPr wrap="square" lIns="0" tIns="0" rIns="0" bIns="0" rtlCol="0" anchor="ctr"/>
           <a:lstStyle/>
           <a:p>
-            <a:pPr indent="0" marL="0">
+            <a:pPr marL="0" indent="0">
               <a:buNone/>
             </a:pPr>
             <a:r>
@@ -3303,6 +3099,7 @@
         <a:solidFill>
           <a:srgbClr val="F4F6F5"/>
         </a:solidFill>
+        <a:effectLst/>
       </p:bgPr>
     </p:bg>
     <p:spTree>
@@ -3340,11 +3137,11 @@
           <a:bodyPr wrap="square" lIns="0" tIns="0" rIns="0" bIns="0" rtlCol="0" anchor="ctr"/>
           <a:lstStyle/>
           <a:p>
-            <a:pPr indent="0" marL="0">
+            <a:pPr marL="0" indent="0">
               <a:buNone/>
             </a:pPr>
             <a:r>
-              <a:rPr lang="en-US" sz="900" spc="100" kern="0" dirty="0">
+              <a:rPr lang="en-US" sz="900" kern="0" spc="100" dirty="0">
                 <a:solidFill>
                   <a:srgbClr val="4B5559"/>
                 </a:solidFill>
@@ -3379,7 +3176,7 @@
           <a:bodyPr wrap="square" lIns="0" tIns="0" rIns="0" bIns="0" rtlCol="0" anchor="ctr"/>
           <a:lstStyle/>
           <a:p>
-            <a:pPr algn="r" indent="0" marL="0">
+            <a:pPr marL="0" indent="0" algn="r">
               <a:buNone/>
             </a:pPr>
             <a:r>
@@ -3418,11 +3215,11 @@
           <a:bodyPr wrap="square" lIns="0" tIns="0" rIns="0" bIns="0" rtlCol="0" anchor="ctr"/>
           <a:lstStyle/>
           <a:p>
-            <a:pPr indent="0" marL="0">
+            <a:pPr marL="0" indent="0">
               <a:buNone/>
             </a:pPr>
             <a:r>
-              <a:rPr lang="en-US" sz="1050" spc="150" kern="0" dirty="0">
+              <a:rPr lang="en-US" sz="1050" kern="0" spc="150" dirty="0">
                 <a:solidFill>
                   <a:srgbClr val="0B6E63"/>
                 </a:solidFill>
@@ -3457,7 +3254,7 @@
           <a:bodyPr wrap="square" lIns="0" tIns="0" rIns="0" bIns="0" rtlCol="0" anchor="t"/>
           <a:lstStyle/>
           <a:p>
-            <a:pPr algn="l" indent="0" marL="0">
+            <a:pPr marL="0" indent="0" algn="l">
               <a:buNone/>
             </a:pPr>
             <a:r>
@@ -3496,7 +3293,7 @@
           <a:bodyPr wrap="square" lIns="0" tIns="0" rIns="0" bIns="0" rtlCol="0" anchor="ctr"/>
           <a:lstStyle/>
           <a:p>
-            <a:pPr indent="0" marL="0">
+            <a:pPr marL="0" indent="0">
               <a:buNone/>
             </a:pPr>
             <a:r>
@@ -3601,7 +3398,7 @@
           <a:bodyPr wrap="square" lIns="0" tIns="0" rIns="0" bIns="0" rtlCol="0" anchor="ctr"/>
           <a:lstStyle/>
           <a:p>
-            <a:pPr indent="0" marL="0">
+            <a:pPr marL="0" indent="0">
               <a:buNone/>
             </a:pPr>
             <a:r>
@@ -3743,6 +3540,7 @@
         <a:solidFill>
           <a:srgbClr val="F4F6F5"/>
         </a:solidFill>
+        <a:effectLst/>
       </p:bgPr>
     </p:bg>
     <p:spTree>
@@ -3780,11 +3578,11 @@
           <a:bodyPr wrap="square" lIns="0" tIns="0" rIns="0" bIns="0" rtlCol="0" anchor="ctr"/>
           <a:lstStyle/>
           <a:p>
-            <a:pPr indent="0" marL="0">
+            <a:pPr marL="0" indent="0">
               <a:buNone/>
             </a:pPr>
             <a:r>
-              <a:rPr lang="en-US" sz="900" spc="100" kern="0" dirty="0">
+              <a:rPr lang="en-US" sz="900" kern="0" spc="100" dirty="0">
                 <a:solidFill>
                   <a:srgbClr val="4B5559"/>
                 </a:solidFill>
@@ -3819,7 +3617,7 @@
           <a:bodyPr wrap="square" lIns="0" tIns="0" rIns="0" bIns="0" rtlCol="0" anchor="ctr"/>
           <a:lstStyle/>
           <a:p>
-            <a:pPr algn="r" indent="0" marL="0">
+            <a:pPr marL="0" indent="0" algn="r">
               <a:buNone/>
             </a:pPr>
             <a:r>
@@ -3858,11 +3656,11 @@
           <a:bodyPr wrap="square" lIns="0" tIns="0" rIns="0" bIns="0" rtlCol="0" anchor="ctr"/>
           <a:lstStyle/>
           <a:p>
-            <a:pPr indent="0" marL="0">
+            <a:pPr marL="0" indent="0">
               <a:buNone/>
             </a:pPr>
             <a:r>
-              <a:rPr lang="en-US" sz="1050" spc="150" kern="0" dirty="0">
+              <a:rPr lang="en-US" sz="1050" kern="0" spc="150" dirty="0">
                 <a:solidFill>
                   <a:srgbClr val="0B6E63"/>
                 </a:solidFill>
@@ -3897,7 +3695,7 @@
           <a:bodyPr wrap="square" lIns="0" tIns="0" rIns="0" bIns="0" rtlCol="0" anchor="t"/>
           <a:lstStyle/>
           <a:p>
-            <a:pPr algn="l" indent="0" marL="0">
+            <a:pPr marL="0" indent="0" algn="l">
               <a:buNone/>
             </a:pPr>
             <a:r>
@@ -3997,6 +3795,7 @@
         <a:solidFill>
           <a:srgbClr val="12181A"/>
         </a:solidFill>
+        <a:effectLst/>
       </p:bgPr>
     </p:bg>
     <p:spTree>
@@ -4032,6 +3831,13 @@
           </a:solidFill>
           <a:ln/>
         </p:spPr>
+        <p:txBody>
+          <a:bodyPr/>
+          <a:lstStyle/>
+          <a:p>
+            <a:endParaRPr lang="en-US"/>
+          </a:p>
+        </p:txBody>
       </p:sp>
       <p:sp>
         <p:nvSpPr>
@@ -4054,7 +3860,7 @@
           <a:bodyPr wrap="square" lIns="0" tIns="0" rIns="0" bIns="0" rtlCol="0" anchor="t"/>
           <a:lstStyle/>
           <a:p>
-            <a:pPr algn="ctr" indent="0" marL="0">
+            <a:pPr marL="0" indent="0" algn="ctr">
               <a:buNone/>
             </a:pPr>
             <a:r>
@@ -4093,7 +3899,7 @@
           <a:bodyPr wrap="square" lIns="0" tIns="0" rIns="0" bIns="0" rtlCol="0" anchor="ctr"/>
           <a:lstStyle/>
           <a:p>
-            <a:pPr algn="ctr" indent="0" marL="0">
+            <a:pPr marL="0" indent="0" algn="ctr">
               <a:buNone/>
             </a:pPr>
             <a:r>
@@ -4132,7 +3938,7 @@
           <a:bodyPr wrap="square" lIns="0" tIns="0" rIns="0" bIns="0" rtlCol="0" anchor="ctr"/>
           <a:lstStyle/>
           <a:p>
-            <a:pPr algn="ctr" indent="0" marL="0">
+            <a:pPr marL="0" indent="0" algn="ctr">
               <a:buNone/>
             </a:pPr>
             <a:r>
@@ -4166,6 +3972,7 @@
         <a:solidFill>
           <a:srgbClr val="F4F6F5"/>
         </a:solidFill>
+        <a:effectLst/>
       </p:bgPr>
     </p:bg>
     <p:spTree>
@@ -4203,11 +4010,11 @@
           <a:bodyPr wrap="square" lIns="0" tIns="0" rIns="0" bIns="0" rtlCol="0" anchor="ctr"/>
           <a:lstStyle/>
           <a:p>
-            <a:pPr indent="0" marL="0">
+            <a:pPr marL="0" indent="0">
               <a:buNone/>
             </a:pPr>
             <a:r>
-              <a:rPr lang="en-US" sz="900" spc="100" kern="0" dirty="0">
+              <a:rPr lang="en-US" sz="900" kern="0" spc="100" dirty="0">
                 <a:solidFill>
                   <a:srgbClr val="4B5559"/>
                 </a:solidFill>
@@ -4242,7 +4049,7 @@
           <a:bodyPr wrap="square" lIns="0" tIns="0" rIns="0" bIns="0" rtlCol="0" anchor="ctr"/>
           <a:lstStyle/>
           <a:p>
-            <a:pPr algn="r" indent="0" marL="0">
+            <a:pPr marL="0" indent="0" algn="r">
               <a:buNone/>
             </a:pPr>
             <a:r>
@@ -4281,11 +4088,11 @@
           <a:bodyPr wrap="square" lIns="0" tIns="0" rIns="0" bIns="0" rtlCol="0" anchor="ctr"/>
           <a:lstStyle/>
           <a:p>
-            <a:pPr indent="0" marL="0">
+            <a:pPr marL="0" indent="0">
               <a:buNone/>
             </a:pPr>
             <a:r>
-              <a:rPr lang="en-US" sz="1050" spc="150" kern="0" dirty="0">
+              <a:rPr lang="en-US" sz="1050" kern="0" spc="150" dirty="0">
                 <a:solidFill>
                   <a:srgbClr val="0B6E63"/>
                 </a:solidFill>
@@ -4320,7 +4127,7 @@
           <a:bodyPr wrap="square" lIns="0" tIns="0" rIns="0" bIns="0" rtlCol="0" anchor="t"/>
           <a:lstStyle/>
           <a:p>
-            <a:pPr algn="l" indent="0" marL="0">
+            <a:pPr marL="0" indent="0" algn="l">
               <a:buNone/>
             </a:pPr>
             <a:r>
@@ -4467,13 +4274,20 @@
           </a:solidFill>
           <a:ln/>
           <a:effectLst>
-            <a:outerShdw sx="100000" sy="100000" kx="0" ky="0" algn="bl" rotWithShape="0" blurRad="76200" dist="25400" dir="5400000">
+            <a:outerShdw blurRad="76200" dist="25400" dir="5400000" algn="bl" rotWithShape="0">
               <a:srgbClr val="12181A">
                 <a:alpha val="18000"/>
               </a:srgbClr>
             </a:outerShdw>
           </a:effectLst>
         </p:spPr>
+        <p:txBody>
+          <a:bodyPr/>
+          <a:lstStyle/>
+          <a:p>
+            <a:endParaRPr lang="en-US"/>
+          </a:p>
+        </p:txBody>
       </p:sp>
       <p:sp>
         <p:nvSpPr>
@@ -4496,11 +4310,11 @@
           <a:bodyPr wrap="square" lIns="0" tIns="0" rIns="0" bIns="0" rtlCol="0" anchor="ctr"/>
           <a:lstStyle/>
           <a:p>
-            <a:pPr indent="0" marL="0">
+            <a:pPr marL="0" indent="0">
               <a:buNone/>
             </a:pPr>
             <a:r>
-              <a:rPr lang="en-US" sz="900" spc="150" kern="0" dirty="0">
+              <a:rPr lang="en-US" sz="900" kern="0" spc="150" dirty="0">
                 <a:solidFill>
                   <a:srgbClr val="0B6E63"/>
                 </a:solidFill>
@@ -4535,7 +4349,7 @@
           <a:bodyPr wrap="square" lIns="0" tIns="0" rIns="0" bIns="0" rtlCol="0" anchor="t"/>
           <a:lstStyle/>
           <a:p>
-            <a:pPr indent="0" marL="0">
+            <a:pPr marL="0" indent="0">
               <a:buNone/>
             </a:pPr>
             <a:r>
@@ -4569,6 +4383,7 @@
         <a:solidFill>
           <a:srgbClr val="F4F6F5"/>
         </a:solidFill>
+        <a:effectLst/>
       </p:bgPr>
     </p:bg>
     <p:spTree>
@@ -4606,11 +4421,11 @@
           <a:bodyPr wrap="square" lIns="0" tIns="0" rIns="0" bIns="0" rtlCol="0" anchor="ctr"/>
           <a:lstStyle/>
           <a:p>
-            <a:pPr indent="0" marL="0">
+            <a:pPr marL="0" indent="0">
               <a:buNone/>
             </a:pPr>
             <a:r>
-              <a:rPr lang="en-US" sz="900" spc="100" kern="0" dirty="0">
+              <a:rPr lang="en-US" sz="900" kern="0" spc="100" dirty="0">
                 <a:solidFill>
                   <a:srgbClr val="4B5559"/>
                 </a:solidFill>
@@ -4645,7 +4460,7 @@
           <a:bodyPr wrap="square" lIns="0" tIns="0" rIns="0" bIns="0" rtlCol="0" anchor="ctr"/>
           <a:lstStyle/>
           <a:p>
-            <a:pPr algn="r" indent="0" marL="0">
+            <a:pPr marL="0" indent="0" algn="r">
               <a:buNone/>
             </a:pPr>
             <a:r>
@@ -4684,11 +4499,11 @@
           <a:bodyPr wrap="square" lIns="0" tIns="0" rIns="0" bIns="0" rtlCol="0" anchor="ctr"/>
           <a:lstStyle/>
           <a:p>
-            <a:pPr indent="0" marL="0">
+            <a:pPr marL="0" indent="0">
               <a:buNone/>
             </a:pPr>
             <a:r>
-              <a:rPr lang="en-US" sz="1050" spc="150" kern="0" dirty="0">
+              <a:rPr lang="en-US" sz="1050" kern="0" spc="150" dirty="0">
                 <a:solidFill>
                   <a:srgbClr val="0B6E63"/>
                 </a:solidFill>
@@ -4723,7 +4538,7 @@
           <a:bodyPr wrap="square" lIns="0" tIns="0" rIns="0" bIns="0" rtlCol="0" anchor="t"/>
           <a:lstStyle/>
           <a:p>
-            <a:pPr algn="l" indent="0" marL="0">
+            <a:pPr marL="0" indent="0" algn="l">
               <a:buNone/>
             </a:pPr>
             <a:r>
@@ -4762,7 +4577,7 @@
           <a:bodyPr wrap="square" lIns="0" tIns="0" rIns="0" bIns="0" rtlCol="0" anchor="ctr"/>
           <a:lstStyle/>
           <a:p>
-            <a:pPr indent="0" marL="0">
+            <a:pPr marL="0" indent="0">
               <a:buNone/>
             </a:pPr>
             <a:r>
@@ -4801,7 +4616,7 @@
           <a:bodyPr wrap="square" lIns="0" tIns="0" rIns="0" bIns="0" rtlCol="0" anchor="ctr"/>
           <a:lstStyle/>
           <a:p>
-            <a:pPr indent="0" marL="0">
+            <a:pPr marL="0" indent="0">
               <a:buNone/>
             </a:pPr>
             <a:r>
@@ -4990,7 +4805,7 @@
           <a:bodyPr wrap="square" lIns="0" tIns="0" rIns="0" bIns="0" rtlCol="0" anchor="ctr"/>
           <a:lstStyle/>
           <a:p>
-            <a:pPr indent="0" marL="0">
+            <a:pPr marL="0" indent="0">
               <a:buNone/>
             </a:pPr>
             <a:r>
@@ -5237,6 +5052,7 @@
         <a:solidFill>
           <a:srgbClr val="F4F6F5"/>
         </a:solidFill>
+        <a:effectLst/>
       </p:bgPr>
     </p:bg>
     <p:spTree>
@@ -5274,11 +5090,11 @@
           <a:bodyPr wrap="square" lIns="0" tIns="0" rIns="0" bIns="0" rtlCol="0" anchor="ctr"/>
           <a:lstStyle/>
           <a:p>
-            <a:pPr indent="0" marL="0">
+            <a:pPr marL="0" indent="0">
               <a:buNone/>
             </a:pPr>
             <a:r>
-              <a:rPr lang="en-US" sz="900" spc="100" kern="0" dirty="0">
+              <a:rPr lang="en-US" sz="900" kern="0" spc="100" dirty="0">
                 <a:solidFill>
                   <a:srgbClr val="4B5559"/>
                 </a:solidFill>
@@ -5313,7 +5129,7 @@
           <a:bodyPr wrap="square" lIns="0" tIns="0" rIns="0" bIns="0" rtlCol="0" anchor="ctr"/>
           <a:lstStyle/>
           <a:p>
-            <a:pPr algn="r" indent="0" marL="0">
+            <a:pPr marL="0" indent="0" algn="r">
               <a:buNone/>
             </a:pPr>
             <a:r>
@@ -5352,11 +5168,11 @@
           <a:bodyPr wrap="square" lIns="0" tIns="0" rIns="0" bIns="0" rtlCol="0" anchor="ctr"/>
           <a:lstStyle/>
           <a:p>
-            <a:pPr indent="0" marL="0">
+            <a:pPr marL="0" indent="0">
               <a:buNone/>
             </a:pPr>
             <a:r>
-              <a:rPr lang="en-US" sz="1050" spc="150" kern="0" dirty="0">
+              <a:rPr lang="en-US" sz="1050" kern="0" spc="150" dirty="0">
                 <a:solidFill>
                   <a:srgbClr val="0B6E63"/>
                 </a:solidFill>
@@ -5391,7 +5207,7 @@
           <a:bodyPr wrap="square" lIns="0" tIns="0" rIns="0" bIns="0" rtlCol="0" anchor="t"/>
           <a:lstStyle/>
           <a:p>
-            <a:pPr algn="l" indent="0" marL="0">
+            <a:pPr marL="0" indent="0" algn="l">
               <a:buNone/>
             </a:pPr>
             <a:r>
@@ -5430,13 +5246,20 @@
           </a:solidFill>
           <a:ln/>
           <a:effectLst>
-            <a:outerShdw sx="100000" sy="100000" kx="0" ky="0" algn="bl" rotWithShape="0" blurRad="76200" dist="25400" dir="5400000">
+            <a:outerShdw blurRad="76200" dist="25400" dir="5400000" algn="bl" rotWithShape="0">
               <a:srgbClr val="12181A">
                 <a:alpha val="18000"/>
               </a:srgbClr>
             </a:outerShdw>
           </a:effectLst>
         </p:spPr>
+        <p:txBody>
+          <a:bodyPr/>
+          <a:lstStyle/>
+          <a:p>
+            <a:endParaRPr lang="en-US"/>
+          </a:p>
+        </p:txBody>
       </p:sp>
       <p:sp>
         <p:nvSpPr>
@@ -5459,7 +5282,7 @@
           <a:bodyPr wrap="square" lIns="0" tIns="0" rIns="0" bIns="0" rtlCol="0" anchor="t"/>
           <a:lstStyle/>
           <a:p>
-            <a:pPr indent="0" marL="0">
+            <a:pPr marL="0" indent="0">
               <a:lnSpc>
                 <a:spcPct val="115000"/>
               </a:lnSpc>
@@ -5501,7 +5324,7 @@
           <a:bodyPr wrap="square" lIns="0" tIns="0" rIns="0" bIns="0" rtlCol="0" anchor="ctr"/>
           <a:lstStyle/>
           <a:p>
-            <a:pPr indent="0" marL="0">
+            <a:pPr marL="0" indent="0">
               <a:buNone/>
             </a:pPr>
             <a:r>
@@ -5540,7 +5363,7 @@
           <a:bodyPr wrap="square" lIns="0" tIns="0" rIns="0" bIns="0" rtlCol="0" anchor="t"/>
           <a:lstStyle/>
           <a:p>
-            <a:pPr indent="0" marL="0">
+            <a:pPr marL="0" indent="0">
               <a:buNone/>
             </a:pPr>
             <a:r>
@@ -5574,6 +5397,7 @@
         <a:solidFill>
           <a:srgbClr val="F4F6F5"/>
         </a:solidFill>
+        <a:effectLst/>
       </p:bgPr>
     </p:bg>
     <p:spTree>
@@ -5611,11 +5435,11 @@
           <a:bodyPr wrap="square" lIns="0" tIns="0" rIns="0" bIns="0" rtlCol="0" anchor="ctr"/>
           <a:lstStyle/>
           <a:p>
-            <a:pPr indent="0" marL="0">
+            <a:pPr marL="0" indent="0">
               <a:buNone/>
             </a:pPr>
             <a:r>
-              <a:rPr lang="en-US" sz="900" spc="100" kern="0" dirty="0">
+              <a:rPr lang="en-US" sz="900" kern="0" spc="100" dirty="0">
                 <a:solidFill>
                   <a:srgbClr val="4B5559"/>
                 </a:solidFill>
@@ -5650,7 +5474,7 @@
           <a:bodyPr wrap="square" lIns="0" tIns="0" rIns="0" bIns="0" rtlCol="0" anchor="ctr"/>
           <a:lstStyle/>
           <a:p>
-            <a:pPr algn="r" indent="0" marL="0">
+            <a:pPr marL="0" indent="0" algn="r">
               <a:buNone/>
             </a:pPr>
             <a:r>
@@ -5689,11 +5513,11 @@
           <a:bodyPr wrap="square" lIns="0" tIns="0" rIns="0" bIns="0" rtlCol="0" anchor="ctr"/>
           <a:lstStyle/>
           <a:p>
-            <a:pPr indent="0" marL="0">
+            <a:pPr marL="0" indent="0">
               <a:buNone/>
             </a:pPr>
             <a:r>
-              <a:rPr lang="en-US" sz="1050" spc="150" kern="0" dirty="0">
+              <a:rPr lang="en-US" sz="1050" kern="0" spc="150" dirty="0">
                 <a:solidFill>
                   <a:srgbClr val="0B6E63"/>
                 </a:solidFill>
@@ -5728,7 +5552,7 @@
           <a:bodyPr wrap="square" lIns="0" tIns="0" rIns="0" bIns="0" rtlCol="0" anchor="t"/>
           <a:lstStyle/>
           <a:p>
-            <a:pPr algn="l" indent="0" marL="0">
+            <a:pPr marL="0" indent="0" algn="l">
               <a:buNone/>
             </a:pPr>
             <a:r>
@@ -5746,45 +5570,1048 @@
           </a:p>
         </p:txBody>
       </p:sp>
-      <p:sp>
-        <p:nvSpPr>
-          <p:cNvPr id="6" name="Shape 4"/>
-          <p:cNvSpPr/>
-          <p:nvPr/>
-        </p:nvSpPr>
-        <p:spPr>
-          <a:xfrm>
-            <a:off x="457200" y="1417320"/>
-            <a:ext cx="1034578" cy="3223260"/>
+      <p:grpSp>
+        <p:nvGrpSpPr>
+          <p:cNvPr id="34" name="Group 33">
+            <a:extLst>
+              <a:ext uri="{FF2B5EF4-FFF2-40B4-BE49-F238E27FC236}">
+                <a16:creationId xmlns:a16="http://schemas.microsoft.com/office/drawing/2014/main" id="{92A77E22-A19D-6226-C797-824B1F3595AF}"/>
+              </a:ext>
+            </a:extLst>
+          </p:cNvPr>
+          <p:cNvGrpSpPr/>
+          <p:nvPr/>
+        </p:nvGrpSpPr>
+        <p:grpSpPr>
+          <a:xfrm>
+            <a:off x="905256" y="1275588"/>
+            <a:ext cx="815122" cy="591432"/>
+            <a:chOff x="566928" y="1600200"/>
+            <a:chExt cx="815122" cy="591432"/>
+          </a:xfrm>
+        </p:grpSpPr>
+        <p:sp>
+          <p:nvSpPr>
+            <p:cNvPr id="7" name="Shape 5"/>
+            <p:cNvSpPr/>
+            <p:nvPr/>
+          </p:nvSpPr>
+          <p:spPr>
+            <a:xfrm>
+              <a:off x="828185" y="1600200"/>
+              <a:ext cx="292608" cy="292608"/>
+            </a:xfrm>
+            <a:prstGeom prst="ellipse">
+              <a:avLst/>
+            </a:prstGeom>
+            <a:solidFill>
+              <a:srgbClr val="0B6E63"/>
+            </a:solidFill>
+            <a:ln/>
+          </p:spPr>
+          <p:txBody>
+            <a:bodyPr/>
+            <a:lstStyle/>
+            <a:p>
+              <a:endParaRPr lang="en-US"/>
+            </a:p>
+          </p:txBody>
+        </p:sp>
+        <p:sp>
+          <p:nvSpPr>
+            <p:cNvPr id="8" name="Text 6"/>
+            <p:cNvSpPr/>
+            <p:nvPr/>
+          </p:nvSpPr>
+          <p:spPr>
+            <a:xfrm>
+              <a:off x="828185" y="1600200"/>
+              <a:ext cx="292608" cy="292608"/>
+            </a:xfrm>
+            <a:prstGeom prst="rect">
+              <a:avLst/>
+            </a:prstGeom>
+            <a:noFill/>
+            <a:ln/>
+          </p:spPr>
+          <p:txBody>
+            <a:bodyPr wrap="square" lIns="0" tIns="0" rIns="0" bIns="0" rtlCol="0" anchor="ctr"/>
+            <a:lstStyle/>
+            <a:p>
+              <a:pPr marL="0" indent="0" algn="ctr">
+                <a:buNone/>
+              </a:pPr>
+              <a:r>
+                <a:rPr lang="en-US" sz="1200" b="1" dirty="0">
+                  <a:solidFill>
+                    <a:srgbClr val="F4FBFA"/>
+                  </a:solidFill>
+                  <a:latin typeface="Consolas" pitchFamily="34" charset="0"/>
+                  <a:ea typeface="Consolas" pitchFamily="34" charset="-122"/>
+                  <a:cs typeface="Consolas" pitchFamily="34" charset="-120"/>
+                </a:rPr>
+                <a:t>1</a:t>
+              </a:r>
+              <a:endParaRPr lang="en-US" sz="1200" dirty="0"/>
+            </a:p>
+          </p:txBody>
+        </p:sp>
+        <p:sp>
+          <p:nvSpPr>
+            <p:cNvPr id="9" name="Text 7"/>
+            <p:cNvSpPr/>
+            <p:nvPr/>
+          </p:nvSpPr>
+          <p:spPr>
+            <a:xfrm>
+              <a:off x="566928" y="1917312"/>
+              <a:ext cx="815122" cy="274320"/>
+            </a:xfrm>
+            <a:prstGeom prst="rect">
+              <a:avLst/>
+            </a:prstGeom>
+            <a:noFill/>
+            <a:ln/>
+          </p:spPr>
+          <p:txBody>
+            <a:bodyPr wrap="square" lIns="0" tIns="0" rIns="0" bIns="0" rtlCol="0" anchor="t"/>
+            <a:lstStyle/>
+            <a:p>
+              <a:pPr marL="0" indent="0" algn="ctr">
+                <a:lnSpc>
+                  <a:spcPct val="110000"/>
+                </a:lnSpc>
+                <a:buNone/>
+              </a:pPr>
+              <a:r>
+                <a:rPr lang="en-US" sz="1100" dirty="0">
+                  <a:solidFill>
+                    <a:srgbClr val="12181A"/>
+                  </a:solidFill>
+                  <a:latin typeface="Calibri" pitchFamily="34" charset="0"/>
+                  <a:ea typeface="Calibri" pitchFamily="34" charset="-122"/>
+                  <a:cs typeface="Calibri" pitchFamily="34" charset="-120"/>
+                </a:rPr>
+                <a:t>Task heading</a:t>
+              </a:r>
+              <a:endParaRPr lang="en-US" sz="1100" dirty="0"/>
+            </a:p>
+          </p:txBody>
+        </p:sp>
+      </p:grpSp>
+      <p:grpSp>
+        <p:nvGrpSpPr>
+          <p:cNvPr id="35" name="Group 34">
+            <a:extLst>
+              <a:ext uri="{FF2B5EF4-FFF2-40B4-BE49-F238E27FC236}">
+                <a16:creationId xmlns:a16="http://schemas.microsoft.com/office/drawing/2014/main" id="{2D3EA37D-4B99-8F79-0706-020018A4B261}"/>
+              </a:ext>
+            </a:extLst>
+          </p:cNvPr>
+          <p:cNvGrpSpPr/>
+          <p:nvPr/>
+        </p:nvGrpSpPr>
+        <p:grpSpPr>
+          <a:xfrm>
+            <a:off x="930752" y="1897549"/>
+            <a:ext cx="815122" cy="600058"/>
+            <a:chOff x="1766098" y="1600200"/>
+            <a:chExt cx="815122" cy="600058"/>
+          </a:xfrm>
+        </p:grpSpPr>
+        <p:sp>
+          <p:nvSpPr>
+            <p:cNvPr id="11" name="Shape 9"/>
+            <p:cNvSpPr/>
+            <p:nvPr/>
+          </p:nvSpPr>
+          <p:spPr>
+            <a:xfrm>
+              <a:off x="2027355" y="1600200"/>
+              <a:ext cx="292608" cy="292608"/>
+            </a:xfrm>
+            <a:prstGeom prst="ellipse">
+              <a:avLst/>
+            </a:prstGeom>
+            <a:solidFill>
+              <a:srgbClr val="0B6E63"/>
+            </a:solidFill>
+            <a:ln/>
+          </p:spPr>
+          <p:txBody>
+            <a:bodyPr/>
+            <a:lstStyle/>
+            <a:p>
+              <a:endParaRPr lang="en-US"/>
+            </a:p>
+          </p:txBody>
+        </p:sp>
+        <p:sp>
+          <p:nvSpPr>
+            <p:cNvPr id="12" name="Text 10"/>
+            <p:cNvSpPr/>
+            <p:nvPr/>
+          </p:nvSpPr>
+          <p:spPr>
+            <a:xfrm>
+              <a:off x="2027355" y="1600200"/>
+              <a:ext cx="292608" cy="292608"/>
+            </a:xfrm>
+            <a:prstGeom prst="rect">
+              <a:avLst/>
+            </a:prstGeom>
+            <a:noFill/>
+            <a:ln/>
+          </p:spPr>
+          <p:txBody>
+            <a:bodyPr wrap="square" lIns="0" tIns="0" rIns="0" bIns="0" rtlCol="0" anchor="ctr"/>
+            <a:lstStyle/>
+            <a:p>
+              <a:pPr marL="0" indent="0" algn="ctr">
+                <a:buNone/>
+              </a:pPr>
+              <a:r>
+                <a:rPr lang="en-US" sz="1200" b="1" dirty="0">
+                  <a:solidFill>
+                    <a:srgbClr val="F4FBFA"/>
+                  </a:solidFill>
+                  <a:latin typeface="Consolas" pitchFamily="34" charset="0"/>
+                  <a:ea typeface="Consolas" pitchFamily="34" charset="-122"/>
+                  <a:cs typeface="Consolas" pitchFamily="34" charset="-120"/>
+                </a:rPr>
+                <a:t>2</a:t>
+              </a:r>
+              <a:endParaRPr lang="en-US" sz="1200" dirty="0"/>
+            </a:p>
+          </p:txBody>
+        </p:sp>
+        <p:sp>
+          <p:nvSpPr>
+            <p:cNvPr id="13" name="Text 11"/>
+            <p:cNvSpPr/>
+            <p:nvPr/>
+          </p:nvSpPr>
+          <p:spPr>
+            <a:xfrm>
+              <a:off x="1766098" y="1925938"/>
+              <a:ext cx="815122" cy="274320"/>
+            </a:xfrm>
+            <a:prstGeom prst="rect">
+              <a:avLst/>
+            </a:prstGeom>
+            <a:noFill/>
+            <a:ln/>
+          </p:spPr>
+          <p:txBody>
+            <a:bodyPr wrap="square" lIns="0" tIns="0" rIns="0" bIns="0" rtlCol="0" anchor="t"/>
+            <a:lstStyle/>
+            <a:p>
+              <a:pPr marL="0" indent="0" algn="ctr">
+                <a:lnSpc>
+                  <a:spcPct val="110000"/>
+                </a:lnSpc>
+                <a:buNone/>
+              </a:pPr>
+              <a:r>
+                <a:rPr lang="en-US" sz="1100" dirty="0">
+                  <a:solidFill>
+                    <a:srgbClr val="12181A"/>
+                  </a:solidFill>
+                  <a:latin typeface="Calibri" pitchFamily="34" charset="0"/>
+                  <a:ea typeface="Calibri" pitchFamily="34" charset="-122"/>
+                  <a:cs typeface="Calibri" pitchFamily="34" charset="-120"/>
+                </a:rPr>
+                <a:t>Introduction</a:t>
+              </a:r>
+              <a:endParaRPr lang="en-US" sz="1100" dirty="0"/>
+            </a:p>
+          </p:txBody>
+        </p:sp>
+      </p:grpSp>
+      <p:grpSp>
+        <p:nvGrpSpPr>
+          <p:cNvPr id="36" name="Group 35">
+            <a:extLst>
+              <a:ext uri="{FF2B5EF4-FFF2-40B4-BE49-F238E27FC236}">
+                <a16:creationId xmlns:a16="http://schemas.microsoft.com/office/drawing/2014/main" id="{49D583D8-2EFA-8D2F-3E51-CA7882F23B5C}"/>
+              </a:ext>
+            </a:extLst>
+          </p:cNvPr>
+          <p:cNvGrpSpPr/>
+          <p:nvPr/>
+        </p:nvGrpSpPr>
+        <p:grpSpPr>
+          <a:xfrm>
+            <a:off x="1543203" y="2334090"/>
+            <a:ext cx="1169471" cy="608684"/>
+            <a:chOff x="2788094" y="1600200"/>
+            <a:chExt cx="1169471" cy="608684"/>
+          </a:xfrm>
+        </p:grpSpPr>
+        <p:sp>
+          <p:nvSpPr>
+            <p:cNvPr id="15" name="Shape 13"/>
+            <p:cNvSpPr/>
+            <p:nvPr/>
+          </p:nvSpPr>
+          <p:spPr>
+            <a:xfrm>
+              <a:off x="3226526" y="1600200"/>
+              <a:ext cx="292608" cy="292608"/>
+            </a:xfrm>
+            <a:prstGeom prst="ellipse">
+              <a:avLst/>
+            </a:prstGeom>
+            <a:solidFill>
+              <a:srgbClr val="0B6E63"/>
+            </a:solidFill>
+            <a:ln/>
+          </p:spPr>
+          <p:txBody>
+            <a:bodyPr/>
+            <a:lstStyle/>
+            <a:p>
+              <a:endParaRPr lang="en-US"/>
+            </a:p>
+          </p:txBody>
+        </p:sp>
+        <p:sp>
+          <p:nvSpPr>
+            <p:cNvPr id="16" name="Text 14"/>
+            <p:cNvSpPr/>
+            <p:nvPr/>
+          </p:nvSpPr>
+          <p:spPr>
+            <a:xfrm>
+              <a:off x="3226526" y="1600200"/>
+              <a:ext cx="292608" cy="292608"/>
+            </a:xfrm>
+            <a:prstGeom prst="rect">
+              <a:avLst/>
+            </a:prstGeom>
+            <a:noFill/>
+            <a:ln/>
+          </p:spPr>
+          <p:txBody>
+            <a:bodyPr wrap="square" lIns="0" tIns="0" rIns="0" bIns="0" rtlCol="0" anchor="ctr"/>
+            <a:lstStyle/>
+            <a:p>
+              <a:pPr marL="0" indent="0" algn="ctr">
+                <a:buNone/>
+              </a:pPr>
+              <a:r>
+                <a:rPr lang="en-US" sz="1200" b="1" dirty="0">
+                  <a:solidFill>
+                    <a:srgbClr val="F4FBFA"/>
+                  </a:solidFill>
+                  <a:latin typeface="Consolas" pitchFamily="34" charset="0"/>
+                  <a:ea typeface="Consolas" pitchFamily="34" charset="-122"/>
+                  <a:cs typeface="Consolas" pitchFamily="34" charset="-120"/>
+                </a:rPr>
+                <a:t>3</a:t>
+              </a:r>
+              <a:endParaRPr lang="en-US" sz="1200" dirty="0"/>
+            </a:p>
+          </p:txBody>
+        </p:sp>
+        <p:sp>
+          <p:nvSpPr>
+            <p:cNvPr id="17" name="Text 15"/>
+            <p:cNvSpPr/>
+            <p:nvPr/>
+          </p:nvSpPr>
+          <p:spPr>
+            <a:xfrm>
+              <a:off x="2788094" y="1934564"/>
+              <a:ext cx="1169471" cy="274320"/>
+            </a:xfrm>
+            <a:prstGeom prst="rect">
+              <a:avLst/>
+            </a:prstGeom>
+            <a:noFill/>
+            <a:ln/>
+          </p:spPr>
+          <p:txBody>
+            <a:bodyPr wrap="square" lIns="0" tIns="0" rIns="0" bIns="0" rtlCol="0" anchor="t"/>
+            <a:lstStyle/>
+            <a:p>
+              <a:pPr marL="0" indent="0" algn="ctr">
+                <a:lnSpc>
+                  <a:spcPct val="110000"/>
+                </a:lnSpc>
+                <a:buNone/>
+              </a:pPr>
+              <a:r>
+                <a:rPr lang="en-US" sz="1100" dirty="0">
+                  <a:solidFill>
+                    <a:srgbClr val="12181A"/>
+                  </a:solidFill>
+                  <a:latin typeface="Calibri" pitchFamily="34" charset="0"/>
+                  <a:ea typeface="Calibri" pitchFamily="34" charset="-122"/>
+                  <a:cs typeface="Calibri" pitchFamily="34" charset="-120"/>
+                </a:rPr>
+                <a:t>Procedure heading</a:t>
+              </a:r>
+              <a:endParaRPr lang="en-US" sz="1100" dirty="0"/>
+            </a:p>
+          </p:txBody>
+        </p:sp>
+      </p:grpSp>
+      <p:grpSp>
+        <p:nvGrpSpPr>
+          <p:cNvPr id="37" name="Group 36">
+            <a:extLst>
+              <a:ext uri="{FF2B5EF4-FFF2-40B4-BE49-F238E27FC236}">
+                <a16:creationId xmlns:a16="http://schemas.microsoft.com/office/drawing/2014/main" id="{595F78CD-8FBC-1829-16D1-263934AB73E9}"/>
+              </a:ext>
+            </a:extLst>
+          </p:cNvPr>
+          <p:cNvGrpSpPr/>
+          <p:nvPr/>
+        </p:nvGrpSpPr>
+        <p:grpSpPr>
+          <a:xfrm>
+            <a:off x="574138" y="2946739"/>
+            <a:ext cx="815122" cy="608684"/>
+            <a:chOff x="4164439" y="1600200"/>
+            <a:chExt cx="815122" cy="608684"/>
+          </a:xfrm>
+        </p:grpSpPr>
+        <p:sp>
+          <p:nvSpPr>
+            <p:cNvPr id="19" name="Shape 17"/>
+            <p:cNvSpPr/>
+            <p:nvPr/>
+          </p:nvSpPr>
+          <p:spPr>
+            <a:xfrm>
+              <a:off x="4425696" y="1600200"/>
+              <a:ext cx="292608" cy="292608"/>
+            </a:xfrm>
+            <a:prstGeom prst="ellipse">
+              <a:avLst/>
+            </a:prstGeom>
+            <a:solidFill>
+              <a:srgbClr val="0B6E63"/>
+            </a:solidFill>
+            <a:ln/>
+          </p:spPr>
+          <p:txBody>
+            <a:bodyPr/>
+            <a:lstStyle/>
+            <a:p>
+              <a:endParaRPr lang="en-US"/>
+            </a:p>
+          </p:txBody>
+        </p:sp>
+        <p:sp>
+          <p:nvSpPr>
+            <p:cNvPr id="20" name="Text 18"/>
+            <p:cNvSpPr/>
+            <p:nvPr/>
+          </p:nvSpPr>
+          <p:spPr>
+            <a:xfrm>
+              <a:off x="4425696" y="1600200"/>
+              <a:ext cx="292608" cy="292608"/>
+            </a:xfrm>
+            <a:prstGeom prst="rect">
+              <a:avLst/>
+            </a:prstGeom>
+            <a:noFill/>
+            <a:ln/>
+          </p:spPr>
+          <p:txBody>
+            <a:bodyPr wrap="square" lIns="0" tIns="0" rIns="0" bIns="0" rtlCol="0" anchor="ctr"/>
+            <a:lstStyle/>
+            <a:p>
+              <a:pPr marL="0" indent="0" algn="ctr">
+                <a:buNone/>
+              </a:pPr>
+              <a:r>
+                <a:rPr lang="en-US" sz="1200" b="1" dirty="0">
+                  <a:solidFill>
+                    <a:srgbClr val="F4FBFA"/>
+                  </a:solidFill>
+                  <a:latin typeface="Consolas" pitchFamily="34" charset="0"/>
+                  <a:ea typeface="Consolas" pitchFamily="34" charset="-122"/>
+                  <a:cs typeface="Consolas" pitchFamily="34" charset="-120"/>
+                </a:rPr>
+                <a:t>4</a:t>
+              </a:r>
+              <a:endParaRPr lang="en-US" sz="1200" dirty="0"/>
+            </a:p>
+          </p:txBody>
+        </p:sp>
+        <p:sp>
+          <p:nvSpPr>
+            <p:cNvPr id="21" name="Text 19"/>
+            <p:cNvSpPr/>
+            <p:nvPr/>
+          </p:nvSpPr>
+          <p:spPr>
+            <a:xfrm>
+              <a:off x="4164439" y="1934564"/>
+              <a:ext cx="815122" cy="274320"/>
+            </a:xfrm>
+            <a:prstGeom prst="rect">
+              <a:avLst/>
+            </a:prstGeom>
+            <a:noFill/>
+            <a:ln/>
+          </p:spPr>
+          <p:txBody>
+            <a:bodyPr wrap="square" lIns="0" tIns="0" rIns="0" bIns="0" rtlCol="0" anchor="t"/>
+            <a:lstStyle/>
+            <a:p>
+              <a:pPr marL="0" indent="0" algn="ctr">
+                <a:lnSpc>
+                  <a:spcPct val="110000"/>
+                </a:lnSpc>
+                <a:buNone/>
+              </a:pPr>
+              <a:r>
+                <a:rPr lang="en-US" sz="1100" dirty="0">
+                  <a:solidFill>
+                    <a:srgbClr val="12181A"/>
+                  </a:solidFill>
+                  <a:latin typeface="Calibri" pitchFamily="34" charset="0"/>
+                  <a:ea typeface="Calibri" pitchFamily="34" charset="-122"/>
+                  <a:cs typeface="Calibri" pitchFamily="34" charset="-120"/>
+                </a:rPr>
+                <a:t>Step</a:t>
+              </a:r>
+              <a:endParaRPr lang="en-US" sz="1100" dirty="0"/>
+            </a:p>
+          </p:txBody>
+        </p:sp>
+      </p:grpSp>
+      <p:grpSp>
+        <p:nvGrpSpPr>
+          <p:cNvPr id="38" name="Group 37">
+            <a:extLst>
+              <a:ext uri="{FF2B5EF4-FFF2-40B4-BE49-F238E27FC236}">
+                <a16:creationId xmlns:a16="http://schemas.microsoft.com/office/drawing/2014/main" id="{3F8BFC46-A4AC-C99E-380B-7B432A8E9A48}"/>
+              </a:ext>
+            </a:extLst>
+          </p:cNvPr>
+          <p:cNvGrpSpPr/>
+          <p:nvPr/>
+        </p:nvGrpSpPr>
+        <p:grpSpPr>
+          <a:xfrm>
+            <a:off x="1074106" y="3165009"/>
+            <a:ext cx="815122" cy="608684"/>
+            <a:chOff x="5363609" y="1600200"/>
+            <a:chExt cx="815122" cy="608684"/>
+          </a:xfrm>
+        </p:grpSpPr>
+        <p:sp>
+          <p:nvSpPr>
+            <p:cNvPr id="23" name="Shape 21"/>
+            <p:cNvSpPr/>
+            <p:nvPr/>
+          </p:nvSpPr>
+          <p:spPr>
+            <a:xfrm>
+              <a:off x="5624866" y="1600200"/>
+              <a:ext cx="292608" cy="292608"/>
+            </a:xfrm>
+            <a:prstGeom prst="ellipse">
+              <a:avLst/>
+            </a:prstGeom>
+            <a:solidFill>
+              <a:srgbClr val="0B6E63"/>
+            </a:solidFill>
+            <a:ln/>
+          </p:spPr>
+          <p:txBody>
+            <a:bodyPr/>
+            <a:lstStyle/>
+            <a:p>
+              <a:endParaRPr lang="en-US"/>
+            </a:p>
+          </p:txBody>
+        </p:sp>
+        <p:sp>
+          <p:nvSpPr>
+            <p:cNvPr id="24" name="Text 22"/>
+            <p:cNvSpPr/>
+            <p:nvPr/>
+          </p:nvSpPr>
+          <p:spPr>
+            <a:xfrm>
+              <a:off x="5624866" y="1600200"/>
+              <a:ext cx="292608" cy="292608"/>
+            </a:xfrm>
+            <a:prstGeom prst="rect">
+              <a:avLst/>
+            </a:prstGeom>
+            <a:noFill/>
+            <a:ln/>
+          </p:spPr>
+          <p:txBody>
+            <a:bodyPr wrap="square" lIns="0" tIns="0" rIns="0" bIns="0" rtlCol="0" anchor="ctr"/>
+            <a:lstStyle/>
+            <a:p>
+              <a:pPr marL="0" indent="0" algn="ctr">
+                <a:buNone/>
+              </a:pPr>
+              <a:r>
+                <a:rPr lang="en-US" sz="1200" b="1" dirty="0">
+                  <a:solidFill>
+                    <a:srgbClr val="F4FBFA"/>
+                  </a:solidFill>
+                  <a:latin typeface="Consolas" pitchFamily="34" charset="0"/>
+                  <a:ea typeface="Consolas" pitchFamily="34" charset="-122"/>
+                  <a:cs typeface="Consolas" pitchFamily="34" charset="-120"/>
+                </a:rPr>
+                <a:t>5</a:t>
+              </a:r>
+              <a:endParaRPr lang="en-US" sz="1200" dirty="0"/>
+            </a:p>
+          </p:txBody>
+        </p:sp>
+        <p:sp>
+          <p:nvSpPr>
+            <p:cNvPr id="25" name="Text 23"/>
+            <p:cNvSpPr/>
+            <p:nvPr/>
+          </p:nvSpPr>
+          <p:spPr>
+            <a:xfrm>
+              <a:off x="5363609" y="1934564"/>
+              <a:ext cx="815122" cy="274320"/>
+            </a:xfrm>
+            <a:prstGeom prst="rect">
+              <a:avLst/>
+            </a:prstGeom>
+            <a:noFill/>
+            <a:ln/>
+          </p:spPr>
+          <p:txBody>
+            <a:bodyPr wrap="square" lIns="0" tIns="0" rIns="0" bIns="0" rtlCol="0" anchor="t"/>
+            <a:lstStyle/>
+            <a:p>
+              <a:pPr marL="0" indent="0" algn="ctr">
+                <a:lnSpc>
+                  <a:spcPct val="110000"/>
+                </a:lnSpc>
+                <a:buNone/>
+              </a:pPr>
+              <a:r>
+                <a:rPr lang="en-US" sz="1100" dirty="0">
+                  <a:solidFill>
+                    <a:srgbClr val="12181A"/>
+                  </a:solidFill>
+                  <a:latin typeface="Calibri" pitchFamily="34" charset="0"/>
+                  <a:ea typeface="Calibri" pitchFamily="34" charset="-122"/>
+                  <a:cs typeface="Calibri" pitchFamily="34" charset="-120"/>
+                </a:rPr>
+                <a:t>Note</a:t>
+              </a:r>
+              <a:endParaRPr lang="en-US" sz="1100" dirty="0"/>
+            </a:p>
+          </p:txBody>
+        </p:sp>
+      </p:grpSp>
+      <p:grpSp>
+        <p:nvGrpSpPr>
+          <p:cNvPr id="39" name="Group 38">
+            <a:extLst>
+              <a:ext uri="{FF2B5EF4-FFF2-40B4-BE49-F238E27FC236}">
+                <a16:creationId xmlns:a16="http://schemas.microsoft.com/office/drawing/2014/main" id="{43034A32-0DB1-5D8F-7231-7DF8C72ACDB2}"/>
+              </a:ext>
+            </a:extLst>
+          </p:cNvPr>
+          <p:cNvGrpSpPr/>
+          <p:nvPr/>
+        </p:nvGrpSpPr>
+        <p:grpSpPr>
+          <a:xfrm>
+            <a:off x="1574074" y="3534156"/>
+            <a:ext cx="815122" cy="600058"/>
+            <a:chOff x="6562779" y="1600200"/>
+            <a:chExt cx="815122" cy="600058"/>
+          </a:xfrm>
+        </p:grpSpPr>
+        <p:sp>
+          <p:nvSpPr>
+            <p:cNvPr id="27" name="Shape 25"/>
+            <p:cNvSpPr/>
+            <p:nvPr/>
+          </p:nvSpPr>
+          <p:spPr>
+            <a:xfrm>
+              <a:off x="6824037" y="1600200"/>
+              <a:ext cx="292608" cy="292608"/>
+            </a:xfrm>
+            <a:prstGeom prst="ellipse">
+              <a:avLst/>
+            </a:prstGeom>
+            <a:solidFill>
+              <a:srgbClr val="0B6E63"/>
+            </a:solidFill>
+            <a:ln/>
+          </p:spPr>
+          <p:txBody>
+            <a:bodyPr/>
+            <a:lstStyle/>
+            <a:p>
+              <a:endParaRPr lang="en-US"/>
+            </a:p>
+          </p:txBody>
+        </p:sp>
+        <p:sp>
+          <p:nvSpPr>
+            <p:cNvPr id="28" name="Text 26"/>
+            <p:cNvSpPr/>
+            <p:nvPr/>
+          </p:nvSpPr>
+          <p:spPr>
+            <a:xfrm>
+              <a:off x="6824037" y="1600200"/>
+              <a:ext cx="292608" cy="292608"/>
+            </a:xfrm>
+            <a:prstGeom prst="rect">
+              <a:avLst/>
+            </a:prstGeom>
+            <a:noFill/>
+            <a:ln/>
+          </p:spPr>
+          <p:txBody>
+            <a:bodyPr wrap="square" lIns="0" tIns="0" rIns="0" bIns="0" rtlCol="0" anchor="ctr"/>
+            <a:lstStyle/>
+            <a:p>
+              <a:pPr marL="0" indent="0" algn="ctr">
+                <a:buNone/>
+              </a:pPr>
+              <a:r>
+                <a:rPr lang="en-US" sz="1200" b="1" dirty="0">
+                  <a:solidFill>
+                    <a:srgbClr val="F4FBFA"/>
+                  </a:solidFill>
+                  <a:latin typeface="Consolas" pitchFamily="34" charset="0"/>
+                  <a:ea typeface="Consolas" pitchFamily="34" charset="-122"/>
+                  <a:cs typeface="Consolas" pitchFamily="34" charset="-120"/>
+                </a:rPr>
+                <a:t>6</a:t>
+              </a:r>
+              <a:endParaRPr lang="en-US" sz="1200" dirty="0"/>
+            </a:p>
+          </p:txBody>
+        </p:sp>
+        <p:sp>
+          <p:nvSpPr>
+            <p:cNvPr id="29" name="Text 27"/>
+            <p:cNvSpPr/>
+            <p:nvPr/>
+          </p:nvSpPr>
+          <p:spPr>
+            <a:xfrm>
+              <a:off x="6562779" y="1925938"/>
+              <a:ext cx="815122" cy="274320"/>
+            </a:xfrm>
+            <a:prstGeom prst="rect">
+              <a:avLst/>
+            </a:prstGeom>
+            <a:noFill/>
+            <a:ln/>
+          </p:spPr>
+          <p:txBody>
+            <a:bodyPr wrap="square" lIns="0" tIns="0" rIns="0" bIns="0" rtlCol="0" anchor="t"/>
+            <a:lstStyle/>
+            <a:p>
+              <a:pPr marL="0" indent="0" algn="ctr">
+                <a:lnSpc>
+                  <a:spcPct val="110000"/>
+                </a:lnSpc>
+                <a:buNone/>
+              </a:pPr>
+              <a:r>
+                <a:rPr lang="en-US" sz="1100" dirty="0">
+                  <a:solidFill>
+                    <a:srgbClr val="12181A"/>
+                  </a:solidFill>
+                  <a:latin typeface="Calibri" pitchFamily="34" charset="0"/>
+                  <a:ea typeface="Calibri" pitchFamily="34" charset="-122"/>
+                  <a:cs typeface="Calibri" pitchFamily="34" charset="-120"/>
+                </a:rPr>
+                <a:t>Optional step</a:t>
+              </a:r>
+              <a:endParaRPr lang="en-US" sz="1100" dirty="0"/>
+            </a:p>
+          </p:txBody>
+        </p:sp>
+      </p:grpSp>
+      <p:grpSp>
+        <p:nvGrpSpPr>
+          <p:cNvPr id="40" name="Group 39">
+            <a:extLst>
+              <a:ext uri="{FF2B5EF4-FFF2-40B4-BE49-F238E27FC236}">
+                <a16:creationId xmlns:a16="http://schemas.microsoft.com/office/drawing/2014/main" id="{E36187E1-9FAF-1313-2C47-29E9EB91C648}"/>
+              </a:ext>
+            </a:extLst>
+          </p:cNvPr>
+          <p:cNvGrpSpPr/>
+          <p:nvPr/>
+        </p:nvGrpSpPr>
+        <p:grpSpPr>
+          <a:xfrm>
+            <a:off x="2203077" y="3998891"/>
+            <a:ext cx="815122" cy="600058"/>
+            <a:chOff x="7761950" y="1600200"/>
+            <a:chExt cx="815122" cy="600058"/>
+          </a:xfrm>
+        </p:grpSpPr>
+        <p:sp>
+          <p:nvSpPr>
+            <p:cNvPr id="31" name="Shape 29"/>
+            <p:cNvSpPr/>
+            <p:nvPr/>
+          </p:nvSpPr>
+          <p:spPr>
+            <a:xfrm>
+              <a:off x="8023207" y="1600200"/>
+              <a:ext cx="292608" cy="292608"/>
+            </a:xfrm>
+            <a:prstGeom prst="ellipse">
+              <a:avLst/>
+            </a:prstGeom>
+            <a:solidFill>
+              <a:srgbClr val="0B6E63"/>
+            </a:solidFill>
+            <a:ln/>
+          </p:spPr>
+          <p:txBody>
+            <a:bodyPr/>
+            <a:lstStyle/>
+            <a:p>
+              <a:endParaRPr lang="en-US"/>
+            </a:p>
+          </p:txBody>
+        </p:sp>
+        <p:sp>
+          <p:nvSpPr>
+            <p:cNvPr id="32" name="Text 30"/>
+            <p:cNvSpPr/>
+            <p:nvPr/>
+          </p:nvSpPr>
+          <p:spPr>
+            <a:xfrm>
+              <a:off x="8023207" y="1600200"/>
+              <a:ext cx="292608" cy="292608"/>
+            </a:xfrm>
+            <a:prstGeom prst="rect">
+              <a:avLst/>
+            </a:prstGeom>
+            <a:noFill/>
+            <a:ln/>
+          </p:spPr>
+          <p:txBody>
+            <a:bodyPr wrap="square" lIns="0" tIns="0" rIns="0" bIns="0" rtlCol="0" anchor="ctr"/>
+            <a:lstStyle/>
+            <a:p>
+              <a:pPr marL="0" indent="0" algn="ctr">
+                <a:buNone/>
+              </a:pPr>
+              <a:r>
+                <a:rPr lang="en-US" sz="1200" b="1" dirty="0">
+                  <a:solidFill>
+                    <a:srgbClr val="F4FBFA"/>
+                  </a:solidFill>
+                  <a:latin typeface="Consolas" pitchFamily="34" charset="0"/>
+                  <a:ea typeface="Consolas" pitchFamily="34" charset="-122"/>
+                  <a:cs typeface="Consolas" pitchFamily="34" charset="-120"/>
+                </a:rPr>
+                <a:t>7</a:t>
+              </a:r>
+              <a:endParaRPr lang="en-US" sz="1200" dirty="0"/>
+            </a:p>
+          </p:txBody>
+        </p:sp>
+        <p:sp>
+          <p:nvSpPr>
+            <p:cNvPr id="33" name="Text 31"/>
+            <p:cNvSpPr/>
+            <p:nvPr/>
+          </p:nvSpPr>
+          <p:spPr>
+            <a:xfrm>
+              <a:off x="7761950" y="1925938"/>
+              <a:ext cx="815122" cy="274320"/>
+            </a:xfrm>
+            <a:prstGeom prst="rect">
+              <a:avLst/>
+            </a:prstGeom>
+            <a:noFill/>
+            <a:ln/>
+          </p:spPr>
+          <p:txBody>
+            <a:bodyPr wrap="square" lIns="0" tIns="0" rIns="0" bIns="0" rtlCol="0" anchor="t"/>
+            <a:lstStyle/>
+            <a:p>
+              <a:pPr marL="0" indent="0" algn="ctr">
+                <a:lnSpc>
+                  <a:spcPct val="110000"/>
+                </a:lnSpc>
+                <a:buNone/>
+              </a:pPr>
+              <a:r>
+                <a:rPr lang="en-US" sz="1100" dirty="0">
+                  <a:solidFill>
+                    <a:srgbClr val="12181A"/>
+                  </a:solidFill>
+                  <a:latin typeface="Calibri" pitchFamily="34" charset="0"/>
+                  <a:ea typeface="Calibri" pitchFamily="34" charset="-122"/>
+                  <a:cs typeface="Calibri" pitchFamily="34" charset="-120"/>
+                </a:rPr>
+                <a:t>Anchor link</a:t>
+              </a:r>
+              <a:endParaRPr lang="en-US" sz="1100" dirty="0"/>
+            </a:p>
+          </p:txBody>
+        </p:sp>
+      </p:grpSp>
+      <p:sp>
+        <p:nvSpPr>
+          <p:cNvPr id="43" name="Shape 6"/>
+          <p:cNvSpPr/>
+          <p:nvPr/>
+        </p:nvSpPr>
+        <p:spPr>
+          <a:xfrm>
+            <a:off x="3814764" y="1052422"/>
+            <a:ext cx="4846320" cy="3783925"/>
           </a:xfrm>
           <a:prstGeom prst="roundRect">
             <a:avLst>
-              <a:gd name="adj" fmla="val 7071"/>
+              <a:gd name="adj" fmla="val 2270"/>
             </a:avLst>
           </a:prstGeom>
           <a:solidFill>
-            <a:srgbClr val="EAEFED"/>
+            <a:srgbClr val="FFFFFF"/>
           </a:solidFill>
-          <a:ln/>
+          <a:ln w="12700">
+            <a:solidFill>
+              <a:srgbClr val="D2DAD7"/>
+            </a:solidFill>
+            <a:prstDash val="solid"/>
+          </a:ln>
           <a:effectLst>
-            <a:outerShdw sx="100000" sy="100000" kx="0" ky="0" algn="bl" rotWithShape="0" blurRad="76200" dist="25400" dir="5400000">
+            <a:outerShdw blurRad="76200" dist="25400" dir="5400000" algn="bl" rotWithShape="0">
               <a:srgbClr val="12181A">
                 <a:alpha val="18000"/>
               </a:srgbClr>
             </a:outerShdw>
           </a:effectLst>
         </p:spPr>
-      </p:sp>
-      <p:sp>
-        <p:nvSpPr>
-          <p:cNvPr id="7" name="Shape 5"/>
-          <p:cNvSpPr/>
-          <p:nvPr/>
-        </p:nvSpPr>
-        <p:spPr>
-          <a:xfrm>
-            <a:off x="828185" y="1600200"/>
-            <a:ext cx="292608" cy="292608"/>
+        <p:txBody>
+          <a:bodyPr/>
+          <a:lstStyle/>
+          <a:p>
+            <a:endParaRPr lang="en-US"/>
+          </a:p>
+        </p:txBody>
+      </p:sp>
+      <p:sp>
+        <p:nvSpPr>
+          <p:cNvPr id="44" name="Shape 7"/>
+          <p:cNvSpPr/>
+          <p:nvPr/>
+        </p:nvSpPr>
+        <p:spPr>
+          <a:xfrm>
+            <a:off x="3979356" y="1160768"/>
+            <a:ext cx="4517136" cy="315294"/>
+          </a:xfrm>
+          <a:prstGeom prst="roundRect">
+            <a:avLst>
+              <a:gd name="adj" fmla="val 18750"/>
+            </a:avLst>
+          </a:prstGeom>
+          <a:solidFill>
+            <a:srgbClr val="FFFFFF"/>
+          </a:solidFill>
+          <a:ln w="9525">
+            <a:solidFill>
+              <a:srgbClr val="D2DAD7"/>
+            </a:solidFill>
+            <a:prstDash val="solid"/>
+          </a:ln>
+        </p:spPr>
+        <p:txBody>
+          <a:bodyPr/>
+          <a:lstStyle/>
+          <a:p>
+            <a:endParaRPr lang="en-US"/>
+          </a:p>
+        </p:txBody>
+      </p:sp>
+      <p:sp>
+        <p:nvSpPr>
+          <p:cNvPr id="45" name="Shape 8"/>
+          <p:cNvSpPr/>
+          <p:nvPr/>
+        </p:nvSpPr>
+        <p:spPr>
+          <a:xfrm>
+            <a:off x="4107372" y="1274077"/>
+            <a:ext cx="82296" cy="88676"/>
+          </a:xfrm>
+          <a:prstGeom prst="ellipse">
+            <a:avLst/>
+          </a:prstGeom>
+          <a:solidFill>
+            <a:srgbClr val="A9631E"/>
+          </a:solidFill>
+          <a:ln/>
+        </p:spPr>
+        <p:txBody>
+          <a:bodyPr/>
+          <a:lstStyle/>
+          <a:p>
+            <a:endParaRPr lang="en-US"/>
+          </a:p>
+        </p:txBody>
+      </p:sp>
+      <p:sp>
+        <p:nvSpPr>
+          <p:cNvPr id="46" name="Shape 9"/>
+          <p:cNvSpPr/>
+          <p:nvPr/>
+        </p:nvSpPr>
+        <p:spPr>
+          <a:xfrm>
+            <a:off x="4253676" y="1274077"/>
+            <a:ext cx="82296" cy="88676"/>
+          </a:xfrm>
+          <a:prstGeom prst="ellipse">
+            <a:avLst/>
+          </a:prstGeom>
+          <a:solidFill>
+            <a:srgbClr val="D2AF7A"/>
+          </a:solidFill>
+          <a:ln/>
+        </p:spPr>
+        <p:txBody>
+          <a:bodyPr/>
+          <a:lstStyle/>
+          <a:p>
+            <a:endParaRPr lang="en-US"/>
+          </a:p>
+        </p:txBody>
+      </p:sp>
+      <p:sp>
+        <p:nvSpPr>
+          <p:cNvPr id="47" name="Shape 10"/>
+          <p:cNvSpPr/>
+          <p:nvPr/>
+        </p:nvSpPr>
+        <p:spPr>
+          <a:xfrm>
+            <a:off x="4399980" y="1274077"/>
+            <a:ext cx="82296" cy="88676"/>
           </a:xfrm>
           <a:prstGeom prst="ellipse">
             <a:avLst/>
@@ -5794,17 +6621,53 @@
           </a:solidFill>
           <a:ln/>
         </p:spPr>
-      </p:sp>
-      <p:sp>
-        <p:nvSpPr>
-          <p:cNvPr id="8" name="Text 6"/>
-          <p:cNvSpPr/>
-          <p:nvPr/>
-        </p:nvSpPr>
-        <p:spPr>
-          <a:xfrm>
-            <a:off x="828185" y="1600200"/>
-            <a:ext cx="292608" cy="292608"/>
+        <p:txBody>
+          <a:bodyPr/>
+          <a:lstStyle/>
+          <a:p>
+            <a:endParaRPr lang="en-US"/>
+          </a:p>
+        </p:txBody>
+      </p:sp>
+      <p:sp>
+        <p:nvSpPr>
+          <p:cNvPr id="48" name="Shape 11"/>
+          <p:cNvSpPr/>
+          <p:nvPr/>
+        </p:nvSpPr>
+        <p:spPr>
+          <a:xfrm>
+            <a:off x="4527996" y="1219885"/>
+            <a:ext cx="3831336" cy="197059"/>
+          </a:xfrm>
+          <a:prstGeom prst="roundRect">
+            <a:avLst>
+              <a:gd name="adj" fmla="val 25000"/>
+            </a:avLst>
+          </a:prstGeom>
+          <a:solidFill>
+            <a:srgbClr val="EAEFED"/>
+          </a:solidFill>
+          <a:ln/>
+        </p:spPr>
+        <p:txBody>
+          <a:bodyPr/>
+          <a:lstStyle/>
+          <a:p>
+            <a:endParaRPr lang="en-US"/>
+          </a:p>
+        </p:txBody>
+      </p:sp>
+      <p:sp>
+        <p:nvSpPr>
+          <p:cNvPr id="49" name="Text 12"/>
+          <p:cNvSpPr/>
+          <p:nvPr/>
+        </p:nvSpPr>
+        <p:spPr>
+          <a:xfrm>
+            <a:off x="4601148" y="1219885"/>
+            <a:ext cx="3694176" cy="197059"/>
           </a:xfrm>
           <a:prstGeom prst="rect">
             <a:avLst/>
@@ -5816,53 +6679,50 @@
           <a:bodyPr wrap="square" lIns="0" tIns="0" rIns="0" bIns="0" rtlCol="0" anchor="ctr"/>
           <a:lstStyle/>
           <a:p>
-            <a:pPr algn="ctr" indent="0" marL="0">
+            <a:pPr marL="0" indent="0">
               <a:buNone/>
             </a:pPr>
             <a:r>
-              <a:rPr lang="en-US" sz="1200" b="1" dirty="0">
-                <a:solidFill>
-                  <a:srgbClr val="F4FBFA"/>
+              <a:rPr lang="en-US" sz="800" dirty="0">
+                <a:solidFill>
+                  <a:srgbClr val="4B5559"/>
                 </a:solidFill>
                 <a:latin typeface="Consolas" pitchFamily="34" charset="0"/>
                 <a:ea typeface="Consolas" pitchFamily="34" charset="-122"/>
                 <a:cs typeface="Consolas" pitchFamily="34" charset="-120"/>
               </a:rPr>
-              <a:t>1</a:t>
-            </a:r>
-            <a:endParaRPr lang="en-US" sz="1200" dirty="0"/>
-          </a:p>
-        </p:txBody>
-      </p:sp>
-      <p:sp>
-        <p:nvSpPr>
-          <p:cNvPr id="9" name="Text 7"/>
-          <p:cNvSpPr/>
-          <p:nvPr/>
-        </p:nvSpPr>
-        <p:spPr>
-          <a:xfrm>
-            <a:off x="566928" y="2020824"/>
-            <a:ext cx="815122" cy="2491740"/>
-          </a:xfrm>
-          <a:prstGeom prst="rect">
-            <a:avLst/>
-          </a:prstGeom>
-          <a:noFill/>
-          <a:ln/>
-        </p:spPr>
-        <p:txBody>
-          <a:bodyPr wrap="square" lIns="0" tIns="0" rIns="0" bIns="0" rtlCol="0" anchor="t"/>
-          <a:lstStyle/>
-          <a:p>
-            <a:pPr algn="ctr" indent="0" marL="0">
-              <a:lnSpc>
-                <a:spcPct val="110000"/>
-              </a:lnSpc>
+              <a:t>solsticedocs.internal/procedure-composer/new</a:t>
+            </a:r>
+            <a:endParaRPr lang="en-US" sz="800" dirty="0"/>
+          </a:p>
+        </p:txBody>
+      </p:sp>
+      <p:sp>
+        <p:nvSpPr>
+          <p:cNvPr id="50" name="Text 13"/>
+          <p:cNvSpPr/>
+          <p:nvPr/>
+        </p:nvSpPr>
+        <p:spPr>
+          <a:xfrm>
+            <a:off x="4013860" y="1581999"/>
+            <a:ext cx="4517136" cy="629422"/>
+          </a:xfrm>
+          <a:prstGeom prst="rect">
+            <a:avLst/>
+          </a:prstGeom>
+          <a:noFill/>
+          <a:ln/>
+        </p:spPr>
+        <p:txBody>
+          <a:bodyPr wrap="square" lIns="0" tIns="0" rIns="0" bIns="0" rtlCol="0" anchor="ctr"/>
+          <a:lstStyle/>
+          <a:p>
+            <a:pPr marL="0" indent="0">
               <a:buNone/>
             </a:pPr>
             <a:r>
-              <a:rPr lang="en-US" sz="1100" dirty="0">
+              <a:rPr lang="en-US" sz="1200" b="1" dirty="0">
                 <a:solidFill>
                   <a:srgbClr val="12181A"/>
                 </a:solidFill>
@@ -5870,51 +6730,27 @@
                 <a:ea typeface="Calibri" pitchFamily="34" charset="-122"/>
                 <a:cs typeface="Calibri" pitchFamily="34" charset="-120"/>
               </a:rPr>
-              <a:t>Task heading</a:t>
-            </a:r>
-            <a:endParaRPr lang="en-US" sz="1100" dirty="0"/>
-          </a:p>
-        </p:txBody>
-      </p:sp>
-      <p:sp>
-        <p:nvSpPr>
-          <p:cNvPr id="10" name="Shape 8"/>
-          <p:cNvSpPr/>
-          <p:nvPr/>
-        </p:nvSpPr>
-        <p:spPr>
-          <a:xfrm>
-            <a:off x="1656370" y="1417320"/>
-            <a:ext cx="1034578" cy="3223260"/>
-          </a:xfrm>
-          <a:prstGeom prst="roundRect">
-            <a:avLst>
-              <a:gd name="adj" fmla="val 7071"/>
-            </a:avLst>
-          </a:prstGeom>
-          <a:solidFill>
-            <a:srgbClr val="EAEFED"/>
-          </a:solidFill>
-          <a:ln/>
-          <a:effectLst>
-            <a:outerShdw sx="100000" sy="100000" kx="0" ky="0" algn="bl" rotWithShape="0" blurRad="76200" dist="25400" dir="5400000">
-              <a:srgbClr val="12181A">
-                <a:alpha val="18000"/>
-              </a:srgbClr>
-            </a:outerShdw>
-          </a:effectLst>
-        </p:spPr>
-      </p:sp>
-      <p:sp>
-        <p:nvSpPr>
-          <p:cNvPr id="11" name="Shape 9"/>
-          <p:cNvSpPr/>
-          <p:nvPr/>
-        </p:nvSpPr>
-        <p:spPr>
-          <a:xfrm>
-            <a:off x="2027355" y="1600200"/>
-            <a:ext cx="292608" cy="292608"/>
+              <a:t>Creating a New Procedure</a:t>
+            </a:r>
+          </a:p>
+          <a:p>
+            <a:r>
+              <a:rPr lang="en-US" sz="1000" dirty="0"/>
+              <a:t>A procedure is a set of steps to accomplish a specific task. Procedures should be clear and concise, with no more than one action per step (unless the actions are very small and related, such as when clicking two options within the same menu).</a:t>
+            </a:r>
+          </a:p>
+        </p:txBody>
+      </p:sp>
+      <p:sp>
+        <p:nvSpPr>
+          <p:cNvPr id="51" name="Shape 14"/>
+          <p:cNvSpPr/>
+          <p:nvPr/>
+        </p:nvSpPr>
+        <p:spPr>
+          <a:xfrm>
+            <a:off x="4056990" y="2539229"/>
+            <a:ext cx="182880" cy="197059"/>
           </a:xfrm>
           <a:prstGeom prst="ellipse">
             <a:avLst/>
@@ -5924,17 +6760,24 @@
           </a:solidFill>
           <a:ln/>
         </p:spPr>
-      </p:sp>
-      <p:sp>
-        <p:nvSpPr>
-          <p:cNvPr id="12" name="Text 10"/>
-          <p:cNvSpPr/>
-          <p:nvPr/>
-        </p:nvSpPr>
-        <p:spPr>
-          <a:xfrm>
-            <a:off x="2027355" y="1600200"/>
-            <a:ext cx="292608" cy="292608"/>
+        <p:txBody>
+          <a:bodyPr/>
+          <a:lstStyle/>
+          <a:p>
+            <a:endParaRPr lang="en-US"/>
+          </a:p>
+        </p:txBody>
+      </p:sp>
+      <p:sp>
+        <p:nvSpPr>
+          <p:cNvPr id="52" name="Text 15"/>
+          <p:cNvSpPr/>
+          <p:nvPr/>
+        </p:nvSpPr>
+        <p:spPr>
+          <a:xfrm>
+            <a:off x="4056990" y="2539229"/>
+            <a:ext cx="182880" cy="197059"/>
           </a:xfrm>
           <a:prstGeom prst="rect">
             <a:avLst/>
@@ -5946,11 +6789,11 @@
           <a:bodyPr wrap="square" lIns="0" tIns="0" rIns="0" bIns="0" rtlCol="0" anchor="ctr"/>
           <a:lstStyle/>
           <a:p>
-            <a:pPr algn="ctr" indent="0" marL="0">
+            <a:pPr marL="0" indent="0" algn="ctr">
               <a:buNone/>
             </a:pPr>
             <a:r>
-              <a:rPr lang="en-US" sz="1200" b="1" dirty="0">
+              <a:rPr lang="en-US" sz="800" b="1" dirty="0">
                 <a:solidFill>
                   <a:srgbClr val="F4FBFA"/>
                 </a:solidFill>
@@ -5958,22 +6801,22 @@
                 <a:ea typeface="Consolas" pitchFamily="34" charset="-122"/>
                 <a:cs typeface="Consolas" pitchFamily="34" charset="-120"/>
               </a:rPr>
-              <a:t>2</a:t>
-            </a:r>
-            <a:endParaRPr lang="en-US" sz="1200" dirty="0"/>
-          </a:p>
-        </p:txBody>
-      </p:sp>
-      <p:sp>
-        <p:nvSpPr>
-          <p:cNvPr id="13" name="Text 11"/>
-          <p:cNvSpPr/>
-          <p:nvPr/>
-        </p:nvSpPr>
-        <p:spPr>
-          <a:xfrm>
-            <a:off x="1766098" y="2020824"/>
-            <a:ext cx="815122" cy="2491740"/>
+              <a:t>1</a:t>
+            </a:r>
+            <a:endParaRPr lang="en-US" sz="800" dirty="0"/>
+          </a:p>
+        </p:txBody>
+      </p:sp>
+      <p:sp>
+        <p:nvSpPr>
+          <p:cNvPr id="53" name="Text 16"/>
+          <p:cNvSpPr/>
+          <p:nvPr/>
+        </p:nvSpPr>
+        <p:spPr>
+          <a:xfrm>
+            <a:off x="4349598" y="2519523"/>
+            <a:ext cx="4224528" cy="315294"/>
           </a:xfrm>
           <a:prstGeom prst="rect">
             <a:avLst/>
@@ -5985,14 +6828,11 @@
           <a:bodyPr wrap="square" lIns="0" tIns="0" rIns="0" bIns="0" rtlCol="0" anchor="t"/>
           <a:lstStyle/>
           <a:p>
-            <a:pPr algn="ctr" indent="0" marL="0">
-              <a:lnSpc>
-                <a:spcPct val="110000"/>
-              </a:lnSpc>
+            <a:pPr marL="0" indent="0">
               <a:buNone/>
             </a:pPr>
             <a:r>
-              <a:rPr lang="en-US" sz="1100" dirty="0">
+              <a:rPr lang="en-US" sz="950" dirty="0">
                 <a:solidFill>
                   <a:srgbClr val="12181A"/>
                 </a:solidFill>
@@ -6000,51 +6840,22 @@
                 <a:ea typeface="Calibri" pitchFamily="34" charset="-122"/>
                 <a:cs typeface="Calibri" pitchFamily="34" charset="-120"/>
               </a:rPr>
-              <a:t>Introduction</a:t>
-            </a:r>
-            <a:endParaRPr lang="en-US" sz="1100" dirty="0"/>
-          </a:p>
-        </p:txBody>
-      </p:sp>
-      <p:sp>
-        <p:nvSpPr>
-          <p:cNvPr id="14" name="Shape 12"/>
-          <p:cNvSpPr/>
-          <p:nvPr/>
-        </p:nvSpPr>
-        <p:spPr>
-          <a:xfrm>
-            <a:off x="2855541" y="1417320"/>
-            <a:ext cx="1034578" cy="3223260"/>
-          </a:xfrm>
-          <a:prstGeom prst="roundRect">
-            <a:avLst>
-              <a:gd name="adj" fmla="val 7071"/>
-            </a:avLst>
-          </a:prstGeom>
-          <a:solidFill>
-            <a:srgbClr val="EAEFED"/>
-          </a:solidFill>
-          <a:ln/>
-          <a:effectLst>
-            <a:outerShdw sx="100000" sy="100000" kx="0" ky="0" algn="bl" rotWithShape="0" blurRad="76200" dist="25400" dir="5400000">
-              <a:srgbClr val="12181A">
-                <a:alpha val="18000"/>
-              </a:srgbClr>
-            </a:outerShdw>
-          </a:effectLst>
-        </p:spPr>
-      </p:sp>
-      <p:sp>
-        <p:nvSpPr>
-          <p:cNvPr id="15" name="Shape 13"/>
-          <p:cNvSpPr/>
-          <p:nvPr/>
-        </p:nvSpPr>
-        <p:spPr>
-          <a:xfrm>
-            <a:off x="3226526" y="1600200"/>
-            <a:ext cx="292608" cy="292608"/>
+              <a:t>Log in to Procedure Composer.</a:t>
+            </a:r>
+            <a:endParaRPr lang="en-US" sz="950" dirty="0"/>
+          </a:p>
+        </p:txBody>
+      </p:sp>
+      <p:sp>
+        <p:nvSpPr>
+          <p:cNvPr id="54" name="Shape 17"/>
+          <p:cNvSpPr/>
+          <p:nvPr/>
+        </p:nvSpPr>
+        <p:spPr>
+          <a:xfrm>
+            <a:off x="4056990" y="2854523"/>
+            <a:ext cx="182880" cy="197059"/>
           </a:xfrm>
           <a:prstGeom prst="ellipse">
             <a:avLst/>
@@ -6054,17 +6865,24 @@
           </a:solidFill>
           <a:ln/>
         </p:spPr>
-      </p:sp>
-      <p:sp>
-        <p:nvSpPr>
-          <p:cNvPr id="16" name="Text 14"/>
-          <p:cNvSpPr/>
-          <p:nvPr/>
-        </p:nvSpPr>
-        <p:spPr>
-          <a:xfrm>
-            <a:off x="3226526" y="1600200"/>
-            <a:ext cx="292608" cy="292608"/>
+        <p:txBody>
+          <a:bodyPr/>
+          <a:lstStyle/>
+          <a:p>
+            <a:endParaRPr lang="en-US"/>
+          </a:p>
+        </p:txBody>
+      </p:sp>
+      <p:sp>
+        <p:nvSpPr>
+          <p:cNvPr id="55" name="Text 18"/>
+          <p:cNvSpPr/>
+          <p:nvPr/>
+        </p:nvSpPr>
+        <p:spPr>
+          <a:xfrm>
+            <a:off x="4056990" y="2854523"/>
+            <a:ext cx="182880" cy="197059"/>
           </a:xfrm>
           <a:prstGeom prst="rect">
             <a:avLst/>
@@ -6076,11 +6894,11 @@
           <a:bodyPr wrap="square" lIns="0" tIns="0" rIns="0" bIns="0" rtlCol="0" anchor="ctr"/>
           <a:lstStyle/>
           <a:p>
-            <a:pPr algn="ctr" indent="0" marL="0">
+            <a:pPr marL="0" indent="0" algn="ctr">
               <a:buNone/>
             </a:pPr>
             <a:r>
-              <a:rPr lang="en-US" sz="1200" b="1" dirty="0">
+              <a:rPr lang="en-US" sz="800" b="1" dirty="0">
                 <a:solidFill>
                   <a:srgbClr val="F4FBFA"/>
                 </a:solidFill>
@@ -6088,22 +6906,22 @@
                 <a:ea typeface="Consolas" pitchFamily="34" charset="-122"/>
                 <a:cs typeface="Consolas" pitchFamily="34" charset="-120"/>
               </a:rPr>
-              <a:t>3</a:t>
-            </a:r>
-            <a:endParaRPr lang="en-US" sz="1200" dirty="0"/>
-          </a:p>
-        </p:txBody>
-      </p:sp>
-      <p:sp>
-        <p:nvSpPr>
-          <p:cNvPr id="17" name="Text 15"/>
-          <p:cNvSpPr/>
-          <p:nvPr/>
-        </p:nvSpPr>
-        <p:spPr>
-          <a:xfrm>
-            <a:off x="2965269" y="2020824"/>
-            <a:ext cx="815122" cy="2491740"/>
+              <a:t>2</a:t>
+            </a:r>
+            <a:endParaRPr lang="en-US" sz="800" dirty="0"/>
+          </a:p>
+        </p:txBody>
+      </p:sp>
+      <p:sp>
+        <p:nvSpPr>
+          <p:cNvPr id="56" name="Text 19"/>
+          <p:cNvSpPr/>
+          <p:nvPr/>
+        </p:nvSpPr>
+        <p:spPr>
+          <a:xfrm>
+            <a:off x="4349598" y="2834817"/>
+            <a:ext cx="4224528" cy="315294"/>
           </a:xfrm>
           <a:prstGeom prst="rect">
             <a:avLst/>
@@ -6115,14 +6933,11 @@
           <a:bodyPr wrap="square" lIns="0" tIns="0" rIns="0" bIns="0" rtlCol="0" anchor="t"/>
           <a:lstStyle/>
           <a:p>
-            <a:pPr algn="ctr" indent="0" marL="0">
-              <a:lnSpc>
-                <a:spcPct val="110000"/>
-              </a:lnSpc>
+            <a:pPr marL="0" indent="0">
               <a:buNone/>
             </a:pPr>
             <a:r>
-              <a:rPr lang="en-US" sz="1100" dirty="0">
+              <a:rPr lang="en-US" sz="950" dirty="0">
                 <a:solidFill>
                   <a:srgbClr val="12181A"/>
                 </a:solidFill>
@@ -6130,51 +6945,44 @@
                 <a:ea typeface="Calibri" pitchFamily="34" charset="-122"/>
                 <a:cs typeface="Calibri" pitchFamily="34" charset="-120"/>
               </a:rPr>
-              <a:t>Procedure heading</a:t>
-            </a:r>
-            <a:endParaRPr lang="en-US" sz="1100" dirty="0"/>
-          </a:p>
-        </p:txBody>
-      </p:sp>
-      <p:sp>
-        <p:nvSpPr>
-          <p:cNvPr id="18" name="Shape 16"/>
-          <p:cNvSpPr/>
-          <p:nvPr/>
-        </p:nvSpPr>
-        <p:spPr>
-          <a:xfrm>
-            <a:off x="4054711" y="1417320"/>
-            <a:ext cx="1034578" cy="3223260"/>
-          </a:xfrm>
-          <a:prstGeom prst="roundRect">
-            <a:avLst>
-              <a:gd name="adj" fmla="val 7071"/>
-            </a:avLst>
-          </a:prstGeom>
-          <a:solidFill>
-            <a:srgbClr val="EAEFED"/>
-          </a:solidFill>
-          <a:ln/>
-          <a:effectLst>
-            <a:outerShdw sx="100000" sy="100000" kx="0" ky="0" algn="bl" rotWithShape="0" blurRad="76200" dist="25400" dir="5400000">
-              <a:srgbClr val="12181A">
-                <a:alpha val="18000"/>
-              </a:srgbClr>
-            </a:outerShdw>
-          </a:effectLst>
-        </p:spPr>
-      </p:sp>
-      <p:sp>
-        <p:nvSpPr>
-          <p:cNvPr id="19" name="Shape 17"/>
-          <p:cNvSpPr/>
-          <p:nvPr/>
-        </p:nvSpPr>
-        <p:spPr>
-          <a:xfrm>
-            <a:off x="4425696" y="1600200"/>
-            <a:ext cx="292608" cy="292608"/>
+              <a:t>Click </a:t>
+            </a:r>
+            <a:r>
+              <a:rPr lang="en-US" sz="950" b="1" dirty="0">
+                <a:solidFill>
+                  <a:srgbClr val="12181A"/>
+                </a:solidFill>
+                <a:latin typeface="Calibri" pitchFamily="34" charset="0"/>
+                <a:ea typeface="Calibri" pitchFamily="34" charset="-122"/>
+                <a:cs typeface="Calibri" pitchFamily="34" charset="-120"/>
+              </a:rPr>
+              <a:t>New Procedure</a:t>
+            </a:r>
+            <a:r>
+              <a:rPr lang="en-US" sz="950" dirty="0">
+                <a:solidFill>
+                  <a:srgbClr val="12181A"/>
+                </a:solidFill>
+                <a:latin typeface="Calibri" pitchFamily="34" charset="0"/>
+                <a:ea typeface="Calibri" pitchFamily="34" charset="-122"/>
+                <a:cs typeface="Calibri" pitchFamily="34" charset="-120"/>
+              </a:rPr>
+              <a:t>.</a:t>
+            </a:r>
+            <a:endParaRPr lang="en-US" sz="950" dirty="0"/>
+          </a:p>
+        </p:txBody>
+      </p:sp>
+      <p:sp>
+        <p:nvSpPr>
+          <p:cNvPr id="57" name="Shape 20"/>
+          <p:cNvSpPr/>
+          <p:nvPr/>
+        </p:nvSpPr>
+        <p:spPr>
+          <a:xfrm>
+            <a:off x="4056990" y="3169817"/>
+            <a:ext cx="182880" cy="197059"/>
           </a:xfrm>
           <a:prstGeom prst="ellipse">
             <a:avLst/>
@@ -6184,17 +6992,24 @@
           </a:solidFill>
           <a:ln/>
         </p:spPr>
-      </p:sp>
-      <p:sp>
-        <p:nvSpPr>
-          <p:cNvPr id="20" name="Text 18"/>
-          <p:cNvSpPr/>
-          <p:nvPr/>
-        </p:nvSpPr>
-        <p:spPr>
-          <a:xfrm>
-            <a:off x="4425696" y="1600200"/>
-            <a:ext cx="292608" cy="292608"/>
+        <p:txBody>
+          <a:bodyPr/>
+          <a:lstStyle/>
+          <a:p>
+            <a:endParaRPr lang="en-US"/>
+          </a:p>
+        </p:txBody>
+      </p:sp>
+      <p:sp>
+        <p:nvSpPr>
+          <p:cNvPr id="58" name="Text 21"/>
+          <p:cNvSpPr/>
+          <p:nvPr/>
+        </p:nvSpPr>
+        <p:spPr>
+          <a:xfrm>
+            <a:off x="4056990" y="3169817"/>
+            <a:ext cx="182880" cy="197059"/>
           </a:xfrm>
           <a:prstGeom prst="rect">
             <a:avLst/>
@@ -6206,11 +7021,11 @@
           <a:bodyPr wrap="square" lIns="0" tIns="0" rIns="0" bIns="0" rtlCol="0" anchor="ctr"/>
           <a:lstStyle/>
           <a:p>
-            <a:pPr algn="ctr" indent="0" marL="0">
+            <a:pPr marL="0" indent="0" algn="ctr">
               <a:buNone/>
             </a:pPr>
             <a:r>
-              <a:rPr lang="en-US" sz="1200" b="1" dirty="0">
+              <a:rPr lang="en-US" sz="800" b="1" dirty="0">
                 <a:solidFill>
                   <a:srgbClr val="F4FBFA"/>
                 </a:solidFill>
@@ -6218,22 +7033,22 @@
                 <a:ea typeface="Consolas" pitchFamily="34" charset="-122"/>
                 <a:cs typeface="Consolas" pitchFamily="34" charset="-120"/>
               </a:rPr>
-              <a:t>4</a:t>
-            </a:r>
-            <a:endParaRPr lang="en-US" sz="1200" dirty="0"/>
-          </a:p>
-        </p:txBody>
-      </p:sp>
-      <p:sp>
-        <p:nvSpPr>
-          <p:cNvPr id="21" name="Text 19"/>
-          <p:cNvSpPr/>
-          <p:nvPr/>
-        </p:nvSpPr>
-        <p:spPr>
-          <a:xfrm>
-            <a:off x="4164439" y="2020824"/>
-            <a:ext cx="815122" cy="2491740"/>
+              <a:t>3</a:t>
+            </a:r>
+            <a:endParaRPr lang="en-US" sz="800" dirty="0"/>
+          </a:p>
+        </p:txBody>
+      </p:sp>
+      <p:sp>
+        <p:nvSpPr>
+          <p:cNvPr id="59" name="Text 22"/>
+          <p:cNvSpPr/>
+          <p:nvPr/>
+        </p:nvSpPr>
+        <p:spPr>
+          <a:xfrm>
+            <a:off x="4349598" y="3150111"/>
+            <a:ext cx="4224528" cy="315294"/>
           </a:xfrm>
           <a:prstGeom prst="rect">
             <a:avLst/>
@@ -6245,14 +7060,11 @@
           <a:bodyPr wrap="square" lIns="0" tIns="0" rIns="0" bIns="0" rtlCol="0" anchor="t"/>
           <a:lstStyle/>
           <a:p>
-            <a:pPr algn="ctr" indent="0" marL="0">
-              <a:lnSpc>
-                <a:spcPct val="110000"/>
-              </a:lnSpc>
+            <a:pPr marL="0" indent="0">
               <a:buNone/>
             </a:pPr>
             <a:r>
-              <a:rPr lang="en-US" sz="1100" dirty="0">
+              <a:rPr lang="en-US" sz="950" dirty="0">
                 <a:solidFill>
                   <a:srgbClr val="12181A"/>
                 </a:solidFill>
@@ -6260,51 +7072,44 @@
                 <a:ea typeface="Calibri" pitchFamily="34" charset="-122"/>
                 <a:cs typeface="Calibri" pitchFamily="34" charset="-120"/>
               </a:rPr>
-              <a:t>Step</a:t>
-            </a:r>
-            <a:endParaRPr lang="en-US" sz="1100" dirty="0"/>
-          </a:p>
-        </p:txBody>
-      </p:sp>
-      <p:sp>
-        <p:nvSpPr>
-          <p:cNvPr id="22" name="Shape 20"/>
-          <p:cNvSpPr/>
-          <p:nvPr/>
-        </p:nvSpPr>
-        <p:spPr>
-          <a:xfrm>
-            <a:off x="5253881" y="1417320"/>
-            <a:ext cx="1034578" cy="3223260"/>
-          </a:xfrm>
-          <a:prstGeom prst="roundRect">
-            <a:avLst>
-              <a:gd name="adj" fmla="val 7071"/>
-            </a:avLst>
-          </a:prstGeom>
-          <a:solidFill>
-            <a:srgbClr val="EAEFED"/>
-          </a:solidFill>
-          <a:ln/>
-          <a:effectLst>
-            <a:outerShdw sx="100000" sy="100000" kx="0" ky="0" algn="bl" rotWithShape="0" blurRad="76200" dist="25400" dir="5400000">
-              <a:srgbClr val="12181A">
-                <a:alpha val="18000"/>
-              </a:srgbClr>
-            </a:outerShdw>
-          </a:effectLst>
-        </p:spPr>
-      </p:sp>
-      <p:sp>
-        <p:nvSpPr>
-          <p:cNvPr id="23" name="Shape 21"/>
-          <p:cNvSpPr/>
-          <p:nvPr/>
-        </p:nvSpPr>
-        <p:spPr>
-          <a:xfrm>
-            <a:off x="5624866" y="1600200"/>
-            <a:ext cx="292608" cy="292608"/>
+              <a:t>In the </a:t>
+            </a:r>
+            <a:r>
+              <a:rPr lang="en-US" sz="950" b="1" dirty="0">
+                <a:solidFill>
+                  <a:srgbClr val="12181A"/>
+                </a:solidFill>
+                <a:latin typeface="Calibri" pitchFamily="34" charset="0"/>
+                <a:ea typeface="Calibri" pitchFamily="34" charset="-122"/>
+                <a:cs typeface="Calibri" pitchFamily="34" charset="-120"/>
+              </a:rPr>
+              <a:t>Title</a:t>
+            </a:r>
+            <a:r>
+              <a:rPr lang="en-US" sz="950" dirty="0">
+                <a:solidFill>
+                  <a:srgbClr val="12181A"/>
+                </a:solidFill>
+                <a:latin typeface="Calibri" pitchFamily="34" charset="0"/>
+                <a:ea typeface="Calibri" pitchFamily="34" charset="-122"/>
+                <a:cs typeface="Calibri" pitchFamily="34" charset="-120"/>
+              </a:rPr>
+              <a:t> field, enter a title for the procedure.</a:t>
+            </a:r>
+            <a:endParaRPr lang="en-US" sz="950" dirty="0"/>
+          </a:p>
+        </p:txBody>
+      </p:sp>
+      <p:sp>
+        <p:nvSpPr>
+          <p:cNvPr id="60" name="Shape 23"/>
+          <p:cNvSpPr/>
+          <p:nvPr/>
+        </p:nvSpPr>
+        <p:spPr>
+          <a:xfrm>
+            <a:off x="4056990" y="4037199"/>
+            <a:ext cx="182880" cy="197059"/>
           </a:xfrm>
           <a:prstGeom prst="ellipse">
             <a:avLst/>
@@ -6314,17 +7119,24 @@
           </a:solidFill>
           <a:ln/>
         </p:spPr>
-      </p:sp>
-      <p:sp>
-        <p:nvSpPr>
-          <p:cNvPr id="24" name="Text 22"/>
-          <p:cNvSpPr/>
-          <p:nvPr/>
-        </p:nvSpPr>
-        <p:spPr>
-          <a:xfrm>
-            <a:off x="5624866" y="1600200"/>
-            <a:ext cx="292608" cy="292608"/>
+        <p:txBody>
+          <a:bodyPr/>
+          <a:lstStyle/>
+          <a:p>
+            <a:endParaRPr lang="en-US"/>
+          </a:p>
+        </p:txBody>
+      </p:sp>
+      <p:sp>
+        <p:nvSpPr>
+          <p:cNvPr id="61" name="Text 24"/>
+          <p:cNvSpPr/>
+          <p:nvPr/>
+        </p:nvSpPr>
+        <p:spPr>
+          <a:xfrm>
+            <a:off x="4056990" y="4037199"/>
+            <a:ext cx="182880" cy="197059"/>
           </a:xfrm>
           <a:prstGeom prst="rect">
             <a:avLst/>
@@ -6336,11 +7148,11 @@
           <a:bodyPr wrap="square" lIns="0" tIns="0" rIns="0" bIns="0" rtlCol="0" anchor="ctr"/>
           <a:lstStyle/>
           <a:p>
-            <a:pPr algn="ctr" indent="0" marL="0">
+            <a:pPr marL="0" indent="0" algn="ctr">
               <a:buNone/>
             </a:pPr>
             <a:r>
-              <a:rPr lang="en-US" sz="1200" b="1" dirty="0">
+              <a:rPr lang="en-US" sz="800" b="1" dirty="0">
                 <a:solidFill>
                   <a:srgbClr val="F4FBFA"/>
                 </a:solidFill>
@@ -6348,22 +7160,22 @@
                 <a:ea typeface="Consolas" pitchFamily="34" charset="-122"/>
                 <a:cs typeface="Consolas" pitchFamily="34" charset="-120"/>
               </a:rPr>
-              <a:t>5</a:t>
-            </a:r>
-            <a:endParaRPr lang="en-US" sz="1200" dirty="0"/>
-          </a:p>
-        </p:txBody>
-      </p:sp>
-      <p:sp>
-        <p:nvSpPr>
-          <p:cNvPr id="25" name="Text 23"/>
-          <p:cNvSpPr/>
-          <p:nvPr/>
-        </p:nvSpPr>
-        <p:spPr>
-          <a:xfrm>
-            <a:off x="5363609" y="2020824"/>
-            <a:ext cx="815122" cy="2491740"/>
+              <a:t>4</a:t>
+            </a:r>
+            <a:endParaRPr lang="en-US" sz="800" dirty="0"/>
+          </a:p>
+        </p:txBody>
+      </p:sp>
+      <p:sp>
+        <p:nvSpPr>
+          <p:cNvPr id="62" name="Text 25"/>
+          <p:cNvSpPr/>
+          <p:nvPr/>
+        </p:nvSpPr>
+        <p:spPr>
+          <a:xfrm>
+            <a:off x="4349598" y="4017493"/>
+            <a:ext cx="4224528" cy="315294"/>
           </a:xfrm>
           <a:prstGeom prst="rect">
             <a:avLst/>
@@ -6375,14 +7187,11 @@
           <a:bodyPr wrap="square" lIns="0" tIns="0" rIns="0" bIns="0" rtlCol="0" anchor="t"/>
           <a:lstStyle/>
           <a:p>
-            <a:pPr algn="ctr" indent="0" marL="0">
-              <a:lnSpc>
-                <a:spcPct val="110000"/>
-              </a:lnSpc>
+            <a:pPr marL="0" indent="0">
               <a:buNone/>
             </a:pPr>
             <a:r>
-              <a:rPr lang="en-US" sz="1100" dirty="0">
+              <a:rPr lang="en-US" sz="950" i="1" dirty="0">
                 <a:solidFill>
                   <a:srgbClr val="12181A"/>
                 </a:solidFill>
@@ -6390,51 +7199,55 @@
                 <a:ea typeface="Calibri" pitchFamily="34" charset="-122"/>
                 <a:cs typeface="Calibri" pitchFamily="34" charset="-120"/>
               </a:rPr>
-              <a:t>Note</a:t>
-            </a:r>
-            <a:endParaRPr lang="en-US" sz="1100" dirty="0"/>
-          </a:p>
-        </p:txBody>
-      </p:sp>
-      <p:sp>
-        <p:nvSpPr>
-          <p:cNvPr id="26" name="Shape 24"/>
-          <p:cNvSpPr/>
-          <p:nvPr/>
-        </p:nvSpPr>
-        <p:spPr>
-          <a:xfrm>
-            <a:off x="6453051" y="1417320"/>
-            <a:ext cx="1034578" cy="3223260"/>
-          </a:xfrm>
-          <a:prstGeom prst="roundRect">
-            <a:avLst>
-              <a:gd name="adj" fmla="val 7071"/>
-            </a:avLst>
-          </a:prstGeom>
-          <a:solidFill>
-            <a:srgbClr val="EAEFED"/>
-          </a:solidFill>
-          <a:ln/>
-          <a:effectLst>
-            <a:outerShdw sx="100000" sy="100000" kx="0" ky="0" algn="bl" rotWithShape="0" blurRad="76200" dist="25400" dir="5400000">
-              <a:srgbClr val="12181A">
-                <a:alpha val="18000"/>
-              </a:srgbClr>
-            </a:outerShdw>
-          </a:effectLst>
-        </p:spPr>
-      </p:sp>
-      <p:sp>
-        <p:nvSpPr>
-          <p:cNvPr id="27" name="Shape 25"/>
-          <p:cNvSpPr/>
-          <p:nvPr/>
-        </p:nvSpPr>
-        <p:spPr>
-          <a:xfrm>
-            <a:off x="6824037" y="1600200"/>
-            <a:ext cx="292608" cy="292608"/>
+              <a:t>Optional</a:t>
+            </a:r>
+            <a:r>
+              <a:rPr lang="en-US" sz="950" dirty="0">
+                <a:solidFill>
+                  <a:srgbClr val="12181A"/>
+                </a:solidFill>
+                <a:latin typeface="Calibri" pitchFamily="34" charset="0"/>
+                <a:ea typeface="Calibri" pitchFamily="34" charset="-122"/>
+                <a:cs typeface="Calibri" pitchFamily="34" charset="-120"/>
+              </a:rPr>
+              <a:t>. In the </a:t>
+            </a:r>
+            <a:r>
+              <a:rPr lang="en-US" sz="950" b="1" dirty="0">
+                <a:solidFill>
+                  <a:srgbClr val="12181A"/>
+                </a:solidFill>
+                <a:latin typeface="Calibri" pitchFamily="34" charset="0"/>
+                <a:ea typeface="Calibri" pitchFamily="34" charset="-122"/>
+                <a:cs typeface="Calibri" pitchFamily="34" charset="-120"/>
+              </a:rPr>
+              <a:t>Labels</a:t>
+            </a:r>
+            <a:r>
+              <a:rPr lang="en-US" sz="950" dirty="0">
+                <a:solidFill>
+                  <a:srgbClr val="12181A"/>
+                </a:solidFill>
+                <a:latin typeface="Calibri" pitchFamily="34" charset="0"/>
+                <a:ea typeface="Calibri" pitchFamily="34" charset="-122"/>
+                <a:cs typeface="Calibri" pitchFamily="34" charset="-120"/>
+              </a:rPr>
+              <a:t> field, add any labels that apply.</a:t>
+            </a:r>
+            <a:endParaRPr lang="en-US" sz="950" dirty="0"/>
+          </a:p>
+        </p:txBody>
+      </p:sp>
+      <p:sp>
+        <p:nvSpPr>
+          <p:cNvPr id="63" name="Shape 26"/>
+          <p:cNvSpPr/>
+          <p:nvPr/>
+        </p:nvSpPr>
+        <p:spPr>
+          <a:xfrm>
+            <a:off x="4056990" y="4352493"/>
+            <a:ext cx="182880" cy="197059"/>
           </a:xfrm>
           <a:prstGeom prst="ellipse">
             <a:avLst/>
@@ -6444,17 +7257,24 @@
           </a:solidFill>
           <a:ln/>
         </p:spPr>
-      </p:sp>
-      <p:sp>
-        <p:nvSpPr>
-          <p:cNvPr id="28" name="Text 26"/>
-          <p:cNvSpPr/>
-          <p:nvPr/>
-        </p:nvSpPr>
-        <p:spPr>
-          <a:xfrm>
-            <a:off x="6824037" y="1600200"/>
-            <a:ext cx="292608" cy="292608"/>
+        <p:txBody>
+          <a:bodyPr/>
+          <a:lstStyle/>
+          <a:p>
+            <a:endParaRPr lang="en-US"/>
+          </a:p>
+        </p:txBody>
+      </p:sp>
+      <p:sp>
+        <p:nvSpPr>
+          <p:cNvPr id="64" name="Text 27"/>
+          <p:cNvSpPr/>
+          <p:nvPr/>
+        </p:nvSpPr>
+        <p:spPr>
+          <a:xfrm>
+            <a:off x="4056990" y="4352493"/>
+            <a:ext cx="182880" cy="197059"/>
           </a:xfrm>
           <a:prstGeom prst="rect">
             <a:avLst/>
@@ -6466,11 +7286,11 @@
           <a:bodyPr wrap="square" lIns="0" tIns="0" rIns="0" bIns="0" rtlCol="0" anchor="ctr"/>
           <a:lstStyle/>
           <a:p>
-            <a:pPr algn="ctr" indent="0" marL="0">
+            <a:pPr marL="0" indent="0" algn="ctr">
               <a:buNone/>
             </a:pPr>
             <a:r>
-              <a:rPr lang="en-US" sz="1200" b="1" dirty="0">
+              <a:rPr lang="en-US" sz="800" b="1" dirty="0">
                 <a:solidFill>
                   <a:srgbClr val="F4FBFA"/>
                 </a:solidFill>
@@ -6478,22 +7298,22 @@
                 <a:ea typeface="Consolas" pitchFamily="34" charset="-122"/>
                 <a:cs typeface="Consolas" pitchFamily="34" charset="-120"/>
               </a:rPr>
-              <a:t>6</a:t>
-            </a:r>
-            <a:endParaRPr lang="en-US" sz="1200" dirty="0"/>
-          </a:p>
-        </p:txBody>
-      </p:sp>
-      <p:sp>
-        <p:nvSpPr>
-          <p:cNvPr id="29" name="Text 27"/>
-          <p:cNvSpPr/>
-          <p:nvPr/>
-        </p:nvSpPr>
-        <p:spPr>
-          <a:xfrm>
-            <a:off x="6562779" y="2020824"/>
-            <a:ext cx="815122" cy="2491740"/>
+              <a:t>5</a:t>
+            </a:r>
+            <a:endParaRPr lang="en-US" sz="800" dirty="0"/>
+          </a:p>
+        </p:txBody>
+      </p:sp>
+      <p:sp>
+        <p:nvSpPr>
+          <p:cNvPr id="65" name="Text 28"/>
+          <p:cNvSpPr/>
+          <p:nvPr/>
+        </p:nvSpPr>
+        <p:spPr>
+          <a:xfrm>
+            <a:off x="4349598" y="4332787"/>
+            <a:ext cx="4224528" cy="315294"/>
           </a:xfrm>
           <a:prstGeom prst="rect">
             <a:avLst/>
@@ -6505,14 +7325,11 @@
           <a:bodyPr wrap="square" lIns="0" tIns="0" rIns="0" bIns="0" rtlCol="0" anchor="t"/>
           <a:lstStyle/>
           <a:p>
-            <a:pPr algn="ctr" indent="0" marL="0">
-              <a:lnSpc>
-                <a:spcPct val="110000"/>
-              </a:lnSpc>
+            <a:pPr marL="0" indent="0">
               <a:buNone/>
             </a:pPr>
             <a:r>
-              <a:rPr lang="en-US" sz="1100" dirty="0">
+              <a:rPr lang="en-US" sz="950" dirty="0">
                 <a:solidFill>
                   <a:srgbClr val="12181A"/>
                 </a:solidFill>
@@ -6520,129 +7337,10 @@
                 <a:ea typeface="Calibri" pitchFamily="34" charset="-122"/>
                 <a:cs typeface="Calibri" pitchFamily="34" charset="-120"/>
               </a:rPr>
-              <a:t>Optional step</a:t>
-            </a:r>
-            <a:endParaRPr lang="en-US" sz="1100" dirty="0"/>
-          </a:p>
-        </p:txBody>
-      </p:sp>
-      <p:sp>
-        <p:nvSpPr>
-          <p:cNvPr id="30" name="Shape 28"/>
-          <p:cNvSpPr/>
-          <p:nvPr/>
-        </p:nvSpPr>
-        <p:spPr>
-          <a:xfrm>
-            <a:off x="7652222" y="1417320"/>
-            <a:ext cx="1034578" cy="3223260"/>
-          </a:xfrm>
-          <a:prstGeom prst="roundRect">
-            <a:avLst>
-              <a:gd name="adj" fmla="val 7071"/>
-            </a:avLst>
-          </a:prstGeom>
-          <a:solidFill>
-            <a:srgbClr val="EAEFED"/>
-          </a:solidFill>
-          <a:ln/>
-          <a:effectLst>
-            <a:outerShdw sx="100000" sy="100000" kx="0" ky="0" algn="bl" rotWithShape="0" blurRad="76200" dist="25400" dir="5400000">
-              <a:srgbClr val="12181A">
-                <a:alpha val="18000"/>
-              </a:srgbClr>
-            </a:outerShdw>
-          </a:effectLst>
-        </p:spPr>
-      </p:sp>
-      <p:sp>
-        <p:nvSpPr>
-          <p:cNvPr id="31" name="Shape 29"/>
-          <p:cNvSpPr/>
-          <p:nvPr/>
-        </p:nvSpPr>
-        <p:spPr>
-          <a:xfrm>
-            <a:off x="8023207" y="1600200"/>
-            <a:ext cx="292608" cy="292608"/>
-          </a:xfrm>
-          <a:prstGeom prst="ellipse">
-            <a:avLst/>
-          </a:prstGeom>
-          <a:solidFill>
-            <a:srgbClr val="0B6E63"/>
-          </a:solidFill>
-          <a:ln/>
-        </p:spPr>
-      </p:sp>
-      <p:sp>
-        <p:nvSpPr>
-          <p:cNvPr id="32" name="Text 30"/>
-          <p:cNvSpPr/>
-          <p:nvPr/>
-        </p:nvSpPr>
-        <p:spPr>
-          <a:xfrm>
-            <a:off x="8023207" y="1600200"/>
-            <a:ext cx="292608" cy="292608"/>
-          </a:xfrm>
-          <a:prstGeom prst="rect">
-            <a:avLst/>
-          </a:prstGeom>
-          <a:noFill/>
-          <a:ln/>
-        </p:spPr>
-        <p:txBody>
-          <a:bodyPr wrap="square" lIns="0" tIns="0" rIns="0" bIns="0" rtlCol="0" anchor="ctr"/>
-          <a:lstStyle/>
-          <a:p>
-            <a:pPr algn="ctr" indent="0" marL="0">
-              <a:buNone/>
-            </a:pPr>
-            <a:r>
-              <a:rPr lang="en-US" sz="1200" b="1" dirty="0">
-                <a:solidFill>
-                  <a:srgbClr val="F4FBFA"/>
-                </a:solidFill>
-                <a:latin typeface="Consolas" pitchFamily="34" charset="0"/>
-                <a:ea typeface="Consolas" pitchFamily="34" charset="-122"/>
-                <a:cs typeface="Consolas" pitchFamily="34" charset="-120"/>
-              </a:rPr>
-              <a:t>7</a:t>
-            </a:r>
-            <a:endParaRPr lang="en-US" sz="1200" dirty="0"/>
-          </a:p>
-        </p:txBody>
-      </p:sp>
-      <p:sp>
-        <p:nvSpPr>
-          <p:cNvPr id="33" name="Text 31"/>
-          <p:cNvSpPr/>
-          <p:nvPr/>
-        </p:nvSpPr>
-        <p:spPr>
-          <a:xfrm>
-            <a:off x="7761950" y="2020824"/>
-            <a:ext cx="815122" cy="2491740"/>
-          </a:xfrm>
-          <a:prstGeom prst="rect">
-            <a:avLst/>
-          </a:prstGeom>
-          <a:noFill/>
-          <a:ln/>
-        </p:spPr>
-        <p:txBody>
-          <a:bodyPr wrap="square" lIns="0" tIns="0" rIns="0" bIns="0" rtlCol="0" anchor="t"/>
-          <a:lstStyle/>
-          <a:p>
-            <a:pPr algn="ctr" indent="0" marL="0">
-              <a:lnSpc>
-                <a:spcPct val="110000"/>
-              </a:lnSpc>
-              <a:buNone/>
-            </a:pPr>
-            <a:r>
-              <a:rPr lang="en-US" sz="1100" dirty="0">
+              <a:t>Click </a:t>
+            </a:r>
+            <a:r>
+              <a:rPr lang="en-US" sz="950" b="1" dirty="0">
                 <a:solidFill>
                   <a:srgbClr val="12181A"/>
                 </a:solidFill>
@@ -6650,9 +7348,193 @@
                 <a:ea typeface="Calibri" pitchFamily="34" charset="-122"/>
                 <a:cs typeface="Calibri" pitchFamily="34" charset="-120"/>
               </a:rPr>
-              <a:t>Anchor link</a:t>
-            </a:r>
-            <a:endParaRPr lang="en-US" sz="1100" dirty="0"/>
+              <a:t>Save</a:t>
+            </a:r>
+            <a:r>
+              <a:rPr lang="en-US" sz="950" dirty="0">
+                <a:solidFill>
+                  <a:srgbClr val="12181A"/>
+                </a:solidFill>
+                <a:latin typeface="Calibri" pitchFamily="34" charset="0"/>
+                <a:ea typeface="Calibri" pitchFamily="34" charset="-122"/>
+                <a:cs typeface="Calibri" pitchFamily="34" charset="-120"/>
+              </a:rPr>
+              <a:t>.</a:t>
+            </a:r>
+            <a:endParaRPr lang="en-US" sz="950" dirty="0"/>
+          </a:p>
+        </p:txBody>
+      </p:sp>
+      <p:sp>
+        <p:nvSpPr>
+          <p:cNvPr id="66" name="Shape 29"/>
+          <p:cNvSpPr/>
+          <p:nvPr/>
+        </p:nvSpPr>
+        <p:spPr>
+          <a:xfrm>
+            <a:off x="4349598" y="3420033"/>
+            <a:ext cx="4168502" cy="492647"/>
+          </a:xfrm>
+          <a:prstGeom prst="roundRect">
+            <a:avLst>
+              <a:gd name="adj" fmla="val 10000"/>
+            </a:avLst>
+          </a:prstGeom>
+          <a:solidFill>
+            <a:srgbClr val="F3E3D0"/>
+          </a:solidFill>
+          <a:ln/>
+        </p:spPr>
+        <p:txBody>
+          <a:bodyPr/>
+          <a:lstStyle/>
+          <a:p>
+            <a:endParaRPr lang="en-US"/>
+          </a:p>
+        </p:txBody>
+      </p:sp>
+      <p:sp>
+        <p:nvSpPr>
+          <p:cNvPr id="67" name="Text 30"/>
+          <p:cNvSpPr/>
+          <p:nvPr/>
+        </p:nvSpPr>
+        <p:spPr>
+          <a:xfrm>
+            <a:off x="4459326" y="3420033"/>
+            <a:ext cx="3965984" cy="492647"/>
+          </a:xfrm>
+          <a:prstGeom prst="rect">
+            <a:avLst/>
+          </a:prstGeom>
+          <a:noFill/>
+          <a:ln/>
+        </p:spPr>
+        <p:txBody>
+          <a:bodyPr wrap="square" lIns="0" tIns="0" rIns="0" bIns="0" rtlCol="0" anchor="ctr"/>
+          <a:lstStyle/>
+          <a:p>
+            <a:pPr marL="0" indent="0">
+              <a:buNone/>
+            </a:pPr>
+            <a:r>
+              <a:rPr lang="en-US" sz="850" b="1" i="1" dirty="0">
+                <a:solidFill>
+                  <a:srgbClr val="A9631E"/>
+                </a:solidFill>
+                <a:latin typeface="Calibri" pitchFamily="34" charset="0"/>
+                <a:ea typeface="Calibri" pitchFamily="34" charset="-122"/>
+                <a:cs typeface="Calibri" pitchFamily="34" charset="-120"/>
+              </a:rPr>
+              <a:t>Note</a:t>
+            </a:r>
+            <a:r>
+              <a:rPr lang="en-US" sz="850" i="1" dirty="0">
+                <a:solidFill>
+                  <a:srgbClr val="A9631E"/>
+                </a:solidFill>
+                <a:latin typeface="Calibri" pitchFamily="34" charset="0"/>
+                <a:ea typeface="Calibri" pitchFamily="34" charset="-122"/>
+                <a:cs typeface="Calibri" pitchFamily="34" charset="-120"/>
+              </a:rPr>
+              <a:t>: Make sure your title begins with a gerund or infinitive verb.</a:t>
+            </a:r>
+            <a:endParaRPr lang="en-US" sz="850" dirty="0"/>
+          </a:p>
+        </p:txBody>
+      </p:sp>
+      <p:sp>
+        <p:nvSpPr>
+          <p:cNvPr id="69" name="Text 16">
+            <a:extLst>
+              <a:ext uri="{FF2B5EF4-FFF2-40B4-BE49-F238E27FC236}">
+                <a16:creationId xmlns:a16="http://schemas.microsoft.com/office/drawing/2014/main" id="{4B9F1BDC-4E11-45AE-F303-14E1AF37CB8F}"/>
+              </a:ext>
+            </a:extLst>
+          </p:cNvPr>
+          <p:cNvSpPr/>
+          <p:nvPr/>
+        </p:nvSpPr>
+        <p:spPr>
+          <a:xfrm>
+            <a:off x="4013860" y="2290643"/>
+            <a:ext cx="4224528" cy="206964"/>
+          </a:xfrm>
+          <a:prstGeom prst="rect">
+            <a:avLst/>
+          </a:prstGeom>
+          <a:noFill/>
+          <a:ln/>
+        </p:spPr>
+        <p:txBody>
+          <a:bodyPr wrap="square" lIns="0" tIns="0" rIns="0" bIns="0" rtlCol="0" anchor="t"/>
+          <a:lstStyle/>
+          <a:p>
+            <a:pPr marL="0" indent="0">
+              <a:buNone/>
+            </a:pPr>
+            <a:r>
+              <a:rPr lang="en-US" sz="950" b="1" dirty="0">
+                <a:solidFill>
+                  <a:srgbClr val="12181A"/>
+                </a:solidFill>
+                <a:latin typeface="Calibri" pitchFamily="34" charset="0"/>
+                <a:ea typeface="Calibri" pitchFamily="34" charset="-122"/>
+                <a:cs typeface="Calibri" pitchFamily="34" charset="-120"/>
+              </a:rPr>
+              <a:t>To create a new procedure:</a:t>
+            </a:r>
+            <a:endParaRPr lang="en-US" sz="950" b="1" dirty="0"/>
+          </a:p>
+        </p:txBody>
+      </p:sp>
+      <p:sp>
+        <p:nvSpPr>
+          <p:cNvPr id="71" name="Text 16">
+            <a:extLst>
+              <a:ext uri="{FF2B5EF4-FFF2-40B4-BE49-F238E27FC236}">
+                <a16:creationId xmlns:a16="http://schemas.microsoft.com/office/drawing/2014/main" id="{46C12CD2-BF6F-84F3-4499-4FC15931CF34}"/>
+              </a:ext>
+            </a:extLst>
+          </p:cNvPr>
+          <p:cNvSpPr/>
+          <p:nvPr/>
+        </p:nvSpPr>
+        <p:spPr>
+          <a:xfrm>
+            <a:off x="4013860" y="4629383"/>
+            <a:ext cx="3611512" cy="206964"/>
+          </a:xfrm>
+          <a:prstGeom prst="rect">
+            <a:avLst/>
+          </a:prstGeom>
+          <a:noFill/>
+          <a:ln/>
+        </p:spPr>
+        <p:txBody>
+          <a:bodyPr wrap="square" lIns="0" tIns="0" rIns="0" bIns="0" rtlCol="0" anchor="t"/>
+          <a:lstStyle/>
+          <a:p>
+            <a:pPr marL="0" indent="0">
+              <a:buNone/>
+            </a:pPr>
+            <a:r>
+              <a:rPr lang="en-US" sz="950" u="sng" dirty="0">
+                <a:solidFill>
+                  <a:srgbClr val="0070C0"/>
+                </a:solidFill>
+                <a:latin typeface="Calibri" pitchFamily="34" charset="0"/>
+                <a:ea typeface="Calibri" pitchFamily="34" charset="-122"/>
+                <a:cs typeface="Calibri" pitchFamily="34" charset="-120"/>
+              </a:rPr>
+              <a:t>Back to Top</a:t>
+            </a:r>
+            <a:endParaRPr lang="en-US" sz="950" u="sng" dirty="0">
+              <a:solidFill>
+                <a:srgbClr val="0070C0"/>
+              </a:solidFill>
+            </a:endParaRPr>
           </a:p>
         </p:txBody>
       </p:sp>
@@ -6672,6 +7554,7 @@
         <a:solidFill>
           <a:srgbClr val="F4F6F5"/>
         </a:solidFill>
+        <a:effectLst/>
       </p:bgPr>
     </p:bg>
     <p:spTree>
@@ -6709,11 +7592,11 @@
           <a:bodyPr wrap="square" lIns="0" tIns="0" rIns="0" bIns="0" rtlCol="0" anchor="ctr"/>
           <a:lstStyle/>
           <a:p>
-            <a:pPr indent="0" marL="0">
+            <a:pPr marL="0" indent="0">
               <a:buNone/>
             </a:pPr>
             <a:r>
-              <a:rPr lang="en-US" sz="900" spc="100" kern="0" dirty="0">
+              <a:rPr lang="en-US" sz="900" kern="0" spc="100" dirty="0">
                 <a:solidFill>
                   <a:srgbClr val="4B5559"/>
                 </a:solidFill>
@@ -6748,7 +7631,7 @@
           <a:bodyPr wrap="square" lIns="0" tIns="0" rIns="0" bIns="0" rtlCol="0" anchor="ctr"/>
           <a:lstStyle/>
           <a:p>
-            <a:pPr algn="r" indent="0" marL="0">
+            <a:pPr marL="0" indent="0" algn="r">
               <a:buNone/>
             </a:pPr>
             <a:r>
@@ -6787,11 +7670,11 @@
           <a:bodyPr wrap="square" lIns="0" tIns="0" rIns="0" bIns="0" rtlCol="0" anchor="ctr"/>
           <a:lstStyle/>
           <a:p>
-            <a:pPr indent="0" marL="0">
+            <a:pPr marL="0" indent="0">
               <a:buNone/>
             </a:pPr>
             <a:r>
-              <a:rPr lang="en-US" sz="1050" spc="150" kern="0" dirty="0">
+              <a:rPr lang="en-US" sz="1050" kern="0" spc="150" dirty="0">
                 <a:solidFill>
                   <a:srgbClr val="0B6E63"/>
                 </a:solidFill>
@@ -6826,7 +7709,7 @@
           <a:bodyPr wrap="square" lIns="0" tIns="0" rIns="0" bIns="0" rtlCol="0" anchor="t"/>
           <a:lstStyle/>
           <a:p>
-            <a:pPr algn="l" indent="0" marL="0">
+            <a:pPr marL="0" indent="0" algn="l">
               <a:buNone/>
             </a:pPr>
             <a:r>
@@ -6865,13 +7748,20 @@
           </a:solidFill>
           <a:ln/>
           <a:effectLst>
-            <a:outerShdw sx="100000" sy="100000" kx="0" ky="0" algn="bl" rotWithShape="0" blurRad="76200" dist="25400" dir="5400000">
+            <a:outerShdw blurRad="76200" dist="25400" dir="5400000" algn="bl" rotWithShape="0">
               <a:srgbClr val="12181A">
                 <a:alpha val="18000"/>
               </a:srgbClr>
             </a:outerShdw>
           </a:effectLst>
         </p:spPr>
+        <p:txBody>
+          <a:bodyPr/>
+          <a:lstStyle/>
+          <a:p>
+            <a:endParaRPr lang="en-US"/>
+          </a:p>
+        </p:txBody>
       </p:sp>
       <p:sp>
         <p:nvSpPr>
@@ -6892,6 +7782,13 @@
           </a:solidFill>
           <a:ln/>
         </p:spPr>
+        <p:txBody>
+          <a:bodyPr/>
+          <a:lstStyle/>
+          <a:p>
+            <a:endParaRPr lang="en-US"/>
+          </a:p>
+        </p:txBody>
       </p:sp>
       <p:sp>
         <p:nvSpPr>
@@ -6914,7 +7811,7 @@
           <a:bodyPr wrap="square" lIns="0" tIns="0" rIns="0" bIns="0" rtlCol="0" anchor="ctr"/>
           <a:lstStyle/>
           <a:p>
-            <a:pPr indent="0" marL="0">
+            <a:pPr marL="0" indent="0">
               <a:buNone/>
             </a:pPr>
             <a:r>
@@ -7040,13 +7937,20 @@
           </a:solidFill>
           <a:ln/>
           <a:effectLst>
-            <a:outerShdw sx="100000" sy="100000" kx="0" ky="0" algn="bl" rotWithShape="0" blurRad="76200" dist="25400" dir="5400000">
+            <a:outerShdw blurRad="76200" dist="25400" dir="5400000" algn="bl" rotWithShape="0">
               <a:srgbClr val="12181A">
                 <a:alpha val="18000"/>
               </a:srgbClr>
             </a:outerShdw>
           </a:effectLst>
         </p:spPr>
+        <p:txBody>
+          <a:bodyPr/>
+          <a:lstStyle/>
+          <a:p>
+            <a:endParaRPr lang="en-US"/>
+          </a:p>
+        </p:txBody>
       </p:sp>
       <p:sp>
         <p:nvSpPr>
@@ -7067,6 +7971,13 @@
           </a:solidFill>
           <a:ln/>
         </p:spPr>
+        <p:txBody>
+          <a:bodyPr/>
+          <a:lstStyle/>
+          <a:p>
+            <a:endParaRPr lang="en-US"/>
+          </a:p>
+        </p:txBody>
       </p:sp>
       <p:sp>
         <p:nvSpPr>
@@ -7089,7 +8000,7 @@
           <a:bodyPr wrap="square" lIns="0" tIns="0" rIns="0" bIns="0" rtlCol="0" anchor="ctr"/>
           <a:lstStyle/>
           <a:p>
-            <a:pPr indent="0" marL="0">
+            <a:pPr marL="0" indent="0">
               <a:buNone/>
             </a:pPr>
             <a:r>
@@ -7210,6 +8121,7 @@
         <a:solidFill>
           <a:srgbClr val="F4F6F5"/>
         </a:solidFill>
+        <a:effectLst/>
       </p:bgPr>
     </p:bg>
     <p:spTree>
@@ -7247,11 +8159,11 @@
           <a:bodyPr wrap="square" lIns="0" tIns="0" rIns="0" bIns="0" rtlCol="0" anchor="ctr"/>
           <a:lstStyle/>
           <a:p>
-            <a:pPr indent="0" marL="0">
+            <a:pPr marL="0" indent="0">
               <a:buNone/>
             </a:pPr>
             <a:r>
-              <a:rPr lang="en-US" sz="900" spc="100" kern="0" dirty="0">
+              <a:rPr lang="en-US" sz="900" kern="0" spc="100" dirty="0">
                 <a:solidFill>
                   <a:srgbClr val="4B5559"/>
                 </a:solidFill>
@@ -7286,7 +8198,7 @@
           <a:bodyPr wrap="square" lIns="0" tIns="0" rIns="0" bIns="0" rtlCol="0" anchor="ctr"/>
           <a:lstStyle/>
           <a:p>
-            <a:pPr algn="r" indent="0" marL="0">
+            <a:pPr marL="0" indent="0" algn="r">
               <a:buNone/>
             </a:pPr>
             <a:r>
@@ -7325,11 +8237,11 @@
           <a:bodyPr wrap="square" lIns="0" tIns="0" rIns="0" bIns="0" rtlCol="0" anchor="ctr"/>
           <a:lstStyle/>
           <a:p>
-            <a:pPr indent="0" marL="0">
+            <a:pPr marL="0" indent="0">
               <a:buNone/>
             </a:pPr>
             <a:r>
-              <a:rPr lang="en-US" sz="1050" spc="150" kern="0" dirty="0">
+              <a:rPr lang="en-US" sz="1050" kern="0" spc="150" dirty="0">
                 <a:solidFill>
                   <a:srgbClr val="0B6E63"/>
                 </a:solidFill>
@@ -7364,7 +8276,7 @@
           <a:bodyPr wrap="square" lIns="0" tIns="0" rIns="0" bIns="0" rtlCol="0" anchor="t"/>
           <a:lstStyle/>
           <a:p>
-            <a:pPr algn="l" indent="0" marL="0">
+            <a:pPr marL="0" indent="0" algn="l">
               <a:buNone/>
             </a:pPr>
             <a:r>
@@ -7403,13 +8315,20 @@
           </a:solidFill>
           <a:ln/>
           <a:effectLst>
-            <a:outerShdw sx="100000" sy="100000" kx="0" ky="0" algn="bl" rotWithShape="0" blurRad="76200" dist="25400" dir="5400000">
+            <a:outerShdw blurRad="76200" dist="25400" dir="5400000" algn="bl" rotWithShape="0">
               <a:srgbClr val="12181A">
                 <a:alpha val="18000"/>
               </a:srgbClr>
             </a:outerShdw>
           </a:effectLst>
         </p:spPr>
+        <p:txBody>
+          <a:bodyPr/>
+          <a:lstStyle/>
+          <a:p>
+            <a:endParaRPr lang="en-US"/>
+          </a:p>
+        </p:txBody>
       </p:sp>
       <p:sp>
         <p:nvSpPr>
@@ -7430,6 +8349,13 @@
           </a:solidFill>
           <a:ln/>
         </p:spPr>
+        <p:txBody>
+          <a:bodyPr/>
+          <a:lstStyle/>
+          <a:p>
+            <a:endParaRPr lang="en-US"/>
+          </a:p>
+        </p:txBody>
       </p:sp>
       <p:sp>
         <p:nvSpPr>
@@ -7452,7 +8378,7 @@
           <a:bodyPr wrap="square" lIns="0" tIns="0" rIns="0" bIns="0" rtlCol="0" anchor="ctr"/>
           <a:lstStyle/>
           <a:p>
-            <a:pPr indent="0" marL="0">
+            <a:pPr marL="0" indent="0">
               <a:buNone/>
             </a:pPr>
             <a:r>
@@ -7599,13 +8525,20 @@
           </a:solidFill>
           <a:ln/>
           <a:effectLst>
-            <a:outerShdw sx="100000" sy="100000" kx="0" ky="0" algn="bl" rotWithShape="0" blurRad="76200" dist="25400" dir="5400000">
+            <a:outerShdw blurRad="76200" dist="25400" dir="5400000" algn="bl" rotWithShape="0">
               <a:srgbClr val="12181A">
                 <a:alpha val="18000"/>
               </a:srgbClr>
             </a:outerShdw>
           </a:effectLst>
         </p:spPr>
+        <p:txBody>
+          <a:bodyPr/>
+          <a:lstStyle/>
+          <a:p>
+            <a:endParaRPr lang="en-US"/>
+          </a:p>
+        </p:txBody>
       </p:sp>
       <p:sp>
         <p:nvSpPr>
@@ -7626,6 +8559,13 @@
           </a:solidFill>
           <a:ln/>
         </p:spPr>
+        <p:txBody>
+          <a:bodyPr/>
+          <a:lstStyle/>
+          <a:p>
+            <a:endParaRPr lang="en-US"/>
+          </a:p>
+        </p:txBody>
       </p:sp>
       <p:sp>
         <p:nvSpPr>
@@ -7648,7 +8588,7 @@
           <a:bodyPr wrap="square" lIns="0" tIns="0" rIns="0" bIns="0" rtlCol="0" anchor="ctr"/>
           <a:lstStyle/>
           <a:p>
-            <a:pPr indent="0" marL="0">
+            <a:pPr marL="0" indent="0">
               <a:buNone/>
             </a:pPr>
             <a:r>
@@ -7748,6 +8688,7 @@
         <a:solidFill>
           <a:srgbClr val="F4F6F5"/>
         </a:solidFill>
+        <a:effectLst/>
       </p:bgPr>
     </p:bg>
     <p:spTree>
@@ -7785,11 +8726,11 @@
           <a:bodyPr wrap="square" lIns="0" tIns="0" rIns="0" bIns="0" rtlCol="0" anchor="ctr"/>
           <a:lstStyle/>
           <a:p>
-            <a:pPr indent="0" marL="0">
+            <a:pPr marL="0" indent="0">
               <a:buNone/>
             </a:pPr>
             <a:r>
-              <a:rPr lang="en-US" sz="900" spc="100" kern="0" dirty="0">
+              <a:rPr lang="en-US" sz="900" kern="0" spc="100" dirty="0">
                 <a:solidFill>
                   <a:srgbClr val="4B5559"/>
                 </a:solidFill>
@@ -7824,7 +8765,7 @@
           <a:bodyPr wrap="square" lIns="0" tIns="0" rIns="0" bIns="0" rtlCol="0" anchor="ctr"/>
           <a:lstStyle/>
           <a:p>
-            <a:pPr algn="r" indent="0" marL="0">
+            <a:pPr marL="0" indent="0" algn="r">
               <a:buNone/>
             </a:pPr>
             <a:r>
@@ -7863,11 +8804,11 @@
           <a:bodyPr wrap="square" lIns="0" tIns="0" rIns="0" bIns="0" rtlCol="0" anchor="ctr"/>
           <a:lstStyle/>
           <a:p>
-            <a:pPr indent="0" marL="0">
+            <a:pPr marL="0" indent="0">
               <a:buNone/>
             </a:pPr>
             <a:r>
-              <a:rPr lang="en-US" sz="1050" spc="150" kern="0" dirty="0">
+              <a:rPr lang="en-US" sz="1050" kern="0" spc="150" dirty="0">
                 <a:solidFill>
                   <a:srgbClr val="0B6E63"/>
                 </a:solidFill>
@@ -7902,7 +8843,7 @@
           <a:bodyPr wrap="square" lIns="0" tIns="0" rIns="0" bIns="0" rtlCol="0" anchor="t"/>
           <a:lstStyle/>
           <a:p>
-            <a:pPr algn="l" indent="0" marL="0">
+            <a:pPr marL="0" indent="0" algn="l">
               <a:buNone/>
             </a:pPr>
             <a:r>
@@ -8067,817 +9008,6 @@
               <a:t>Don't: Omit the procedure heading if there's no introduction — unless your style guide says otherwise.</a:t>
             </a:r>
             <a:endParaRPr lang="en-US" sz="1250" dirty="0"/>
-          </a:p>
-        </p:txBody>
-      </p:sp>
-      <p:sp>
-        <p:nvSpPr>
-          <p:cNvPr id="7" name="Text 5"/>
-          <p:cNvSpPr/>
-          <p:nvPr/>
-        </p:nvSpPr>
-        <p:spPr>
-          <a:xfrm>
-            <a:off x="3840480" y="1161288"/>
-            <a:ext cx="4846320" cy="219456"/>
-          </a:xfrm>
-          <a:prstGeom prst="rect">
-            <a:avLst/>
-          </a:prstGeom>
-          <a:noFill/>
-          <a:ln/>
-        </p:spPr>
-        <p:txBody>
-          <a:bodyPr wrap="square" lIns="0" tIns="0" rIns="0" bIns="0" rtlCol="0" anchor="ctr"/>
-          <a:lstStyle/>
-          <a:p>
-            <a:pPr indent="0" marL="0">
-              <a:buNone/>
-            </a:pPr>
-            <a:r>
-              <a:rPr lang="en-US" sz="850" spc="120" kern="0" dirty="0">
-                <a:solidFill>
-                  <a:srgbClr val="4B5559"/>
-                </a:solidFill>
-                <a:latin typeface="Consolas" pitchFamily="34" charset="0"/>
-                <a:ea typeface="Consolas" pitchFamily="34" charset="-122"/>
-                <a:cs typeface="Consolas" pitchFamily="34" charset="-120"/>
-              </a:rPr>
-              <a:t>EXAMPLE — PROCEDURE COMPOSER</a:t>
-            </a:r>
-            <a:endParaRPr lang="en-US" sz="850" dirty="0"/>
-          </a:p>
-        </p:txBody>
-      </p:sp>
-      <p:sp>
-        <p:nvSpPr>
-          <p:cNvPr id="8" name="Shape 6"/>
-          <p:cNvSpPr/>
-          <p:nvPr/>
-        </p:nvSpPr>
-        <p:spPr>
-          <a:xfrm>
-            <a:off x="3840480" y="1417320"/>
-            <a:ext cx="4846320" cy="3223260"/>
-          </a:xfrm>
-          <a:prstGeom prst="roundRect">
-            <a:avLst>
-              <a:gd name="adj" fmla="val 2270"/>
-            </a:avLst>
-          </a:prstGeom>
-          <a:solidFill>
-            <a:srgbClr val="FFFFFF"/>
-          </a:solidFill>
-          <a:ln w="12700">
-            <a:solidFill>
-              <a:srgbClr val="D2DAD7"/>
-            </a:solidFill>
-            <a:prstDash val="solid"/>
-          </a:ln>
-          <a:effectLst>
-            <a:outerShdw sx="100000" sy="100000" kx="0" ky="0" algn="bl" rotWithShape="0" blurRad="76200" dist="25400" dir="5400000">
-              <a:srgbClr val="12181A">
-                <a:alpha val="18000"/>
-              </a:srgbClr>
-            </a:outerShdw>
-          </a:effectLst>
-        </p:spPr>
-      </p:sp>
-      <p:sp>
-        <p:nvSpPr>
-          <p:cNvPr id="9" name="Shape 7"/>
-          <p:cNvSpPr/>
-          <p:nvPr/>
-        </p:nvSpPr>
-        <p:spPr>
-          <a:xfrm>
-            <a:off x="4005072" y="1581912"/>
-            <a:ext cx="4517136" cy="292608"/>
-          </a:xfrm>
-          <a:prstGeom prst="roundRect">
-            <a:avLst>
-              <a:gd name="adj" fmla="val 18750"/>
-            </a:avLst>
-          </a:prstGeom>
-          <a:solidFill>
-            <a:srgbClr val="FFFFFF"/>
-          </a:solidFill>
-          <a:ln w="9525">
-            <a:solidFill>
-              <a:srgbClr val="D2DAD7"/>
-            </a:solidFill>
-            <a:prstDash val="solid"/>
-          </a:ln>
-        </p:spPr>
-      </p:sp>
-      <p:sp>
-        <p:nvSpPr>
-          <p:cNvPr id="10" name="Shape 8"/>
-          <p:cNvSpPr/>
-          <p:nvPr/>
-        </p:nvSpPr>
-        <p:spPr>
-          <a:xfrm>
-            <a:off x="4133088" y="1687068"/>
-            <a:ext cx="82296" cy="82296"/>
-          </a:xfrm>
-          <a:prstGeom prst="ellipse">
-            <a:avLst/>
-          </a:prstGeom>
-          <a:solidFill>
-            <a:srgbClr val="A9631E"/>
-          </a:solidFill>
-          <a:ln/>
-        </p:spPr>
-      </p:sp>
-      <p:sp>
-        <p:nvSpPr>
-          <p:cNvPr id="11" name="Shape 9"/>
-          <p:cNvSpPr/>
-          <p:nvPr/>
-        </p:nvSpPr>
-        <p:spPr>
-          <a:xfrm>
-            <a:off x="4279392" y="1687068"/>
-            <a:ext cx="82296" cy="82296"/>
-          </a:xfrm>
-          <a:prstGeom prst="ellipse">
-            <a:avLst/>
-          </a:prstGeom>
-          <a:solidFill>
-            <a:srgbClr val="D2AF7A"/>
-          </a:solidFill>
-          <a:ln/>
-        </p:spPr>
-      </p:sp>
-      <p:sp>
-        <p:nvSpPr>
-          <p:cNvPr id="12" name="Shape 10"/>
-          <p:cNvSpPr/>
-          <p:nvPr/>
-        </p:nvSpPr>
-        <p:spPr>
-          <a:xfrm>
-            <a:off x="4425696" y="1687068"/>
-            <a:ext cx="82296" cy="82296"/>
-          </a:xfrm>
-          <a:prstGeom prst="ellipse">
-            <a:avLst/>
-          </a:prstGeom>
-          <a:solidFill>
-            <a:srgbClr val="0B6E63"/>
-          </a:solidFill>
-          <a:ln/>
-        </p:spPr>
-      </p:sp>
-      <p:sp>
-        <p:nvSpPr>
-          <p:cNvPr id="13" name="Shape 11"/>
-          <p:cNvSpPr/>
-          <p:nvPr/>
-        </p:nvSpPr>
-        <p:spPr>
-          <a:xfrm>
-            <a:off x="4553712" y="1636776"/>
-            <a:ext cx="3831336" cy="182880"/>
-          </a:xfrm>
-          <a:prstGeom prst="roundRect">
-            <a:avLst>
-              <a:gd name="adj" fmla="val 25000"/>
-            </a:avLst>
-          </a:prstGeom>
-          <a:solidFill>
-            <a:srgbClr val="EAEFED"/>
-          </a:solidFill>
-          <a:ln/>
-        </p:spPr>
-      </p:sp>
-      <p:sp>
-        <p:nvSpPr>
-          <p:cNvPr id="14" name="Text 12"/>
-          <p:cNvSpPr/>
-          <p:nvPr/>
-        </p:nvSpPr>
-        <p:spPr>
-          <a:xfrm>
-            <a:off x="4626864" y="1636776"/>
-            <a:ext cx="3694176" cy="182880"/>
-          </a:xfrm>
-          <a:prstGeom prst="rect">
-            <a:avLst/>
-          </a:prstGeom>
-          <a:noFill/>
-          <a:ln/>
-        </p:spPr>
-        <p:txBody>
-          <a:bodyPr wrap="square" lIns="0" tIns="0" rIns="0" bIns="0" rtlCol="0" anchor="ctr"/>
-          <a:lstStyle/>
-          <a:p>
-            <a:pPr indent="0" marL="0">
-              <a:buNone/>
-            </a:pPr>
-            <a:r>
-              <a:rPr lang="en-US" sz="800" dirty="0">
-                <a:solidFill>
-                  <a:srgbClr val="4B5559"/>
-                </a:solidFill>
-                <a:latin typeface="Consolas" pitchFamily="34" charset="0"/>
-                <a:ea typeface="Consolas" pitchFamily="34" charset="-122"/>
-                <a:cs typeface="Consolas" pitchFamily="34" charset="-120"/>
-              </a:rPr>
-              <a:t>solsticedocs.internal/procedure-composer/new</a:t>
-            </a:r>
-            <a:endParaRPr lang="en-US" sz="800" dirty="0"/>
-          </a:p>
-        </p:txBody>
-      </p:sp>
-      <p:sp>
-        <p:nvSpPr>
-          <p:cNvPr id="15" name="Text 13"/>
-          <p:cNvSpPr/>
-          <p:nvPr/>
-        </p:nvSpPr>
-        <p:spPr>
-          <a:xfrm>
-            <a:off x="4005072" y="2020824"/>
-            <a:ext cx="4517136" cy="274320"/>
-          </a:xfrm>
-          <a:prstGeom prst="rect">
-            <a:avLst/>
-          </a:prstGeom>
-          <a:noFill/>
-          <a:ln/>
-        </p:spPr>
-        <p:txBody>
-          <a:bodyPr wrap="square" lIns="0" tIns="0" rIns="0" bIns="0" rtlCol="0" anchor="ctr"/>
-          <a:lstStyle/>
-          <a:p>
-            <a:pPr indent="0" marL="0">
-              <a:buNone/>
-            </a:pPr>
-            <a:r>
-              <a:rPr lang="en-US" sz="1200" b="1" dirty="0">
-                <a:solidFill>
-                  <a:srgbClr val="12181A"/>
-                </a:solidFill>
-                <a:latin typeface="Calibri" pitchFamily="34" charset="0"/>
-                <a:ea typeface="Calibri" pitchFamily="34" charset="-122"/>
-                <a:cs typeface="Calibri" pitchFamily="34" charset="-120"/>
-              </a:rPr>
-              <a:t>Creating a New Procedure</a:t>
-            </a:r>
-            <a:endParaRPr lang="en-US" sz="1200" dirty="0"/>
-          </a:p>
-        </p:txBody>
-      </p:sp>
-      <p:sp>
-        <p:nvSpPr>
-          <p:cNvPr id="16" name="Shape 14"/>
-          <p:cNvSpPr/>
-          <p:nvPr/>
-        </p:nvSpPr>
-        <p:spPr>
-          <a:xfrm>
-            <a:off x="4005072" y="2404872"/>
-            <a:ext cx="182880" cy="182880"/>
-          </a:xfrm>
-          <a:prstGeom prst="ellipse">
-            <a:avLst/>
-          </a:prstGeom>
-          <a:solidFill>
-            <a:srgbClr val="0B6E63"/>
-          </a:solidFill>
-          <a:ln/>
-        </p:spPr>
-      </p:sp>
-      <p:sp>
-        <p:nvSpPr>
-          <p:cNvPr id="17" name="Text 15"/>
-          <p:cNvSpPr/>
-          <p:nvPr/>
-        </p:nvSpPr>
-        <p:spPr>
-          <a:xfrm>
-            <a:off x="4005072" y="2404872"/>
-            <a:ext cx="182880" cy="182880"/>
-          </a:xfrm>
-          <a:prstGeom prst="rect">
-            <a:avLst/>
-          </a:prstGeom>
-          <a:noFill/>
-          <a:ln/>
-        </p:spPr>
-        <p:txBody>
-          <a:bodyPr wrap="square" lIns="0" tIns="0" rIns="0" bIns="0" rtlCol="0" anchor="ctr"/>
-          <a:lstStyle/>
-          <a:p>
-            <a:pPr algn="ctr" indent="0" marL="0">
-              <a:buNone/>
-            </a:pPr>
-            <a:r>
-              <a:rPr lang="en-US" sz="800" b="1" dirty="0">
-                <a:solidFill>
-                  <a:srgbClr val="F4FBFA"/>
-                </a:solidFill>
-                <a:latin typeface="Consolas" pitchFamily="34" charset="0"/>
-                <a:ea typeface="Consolas" pitchFamily="34" charset="-122"/>
-                <a:cs typeface="Consolas" pitchFamily="34" charset="-120"/>
-              </a:rPr>
-              <a:t>1</a:t>
-            </a:r>
-            <a:endParaRPr lang="en-US" sz="800" dirty="0"/>
-          </a:p>
-        </p:txBody>
-      </p:sp>
-      <p:sp>
-        <p:nvSpPr>
-          <p:cNvPr id="18" name="Text 16"/>
-          <p:cNvSpPr/>
-          <p:nvPr/>
-        </p:nvSpPr>
-        <p:spPr>
-          <a:xfrm>
-            <a:off x="4297680" y="2386584"/>
-            <a:ext cx="4224528" cy="292608"/>
-          </a:xfrm>
-          <a:prstGeom prst="rect">
-            <a:avLst/>
-          </a:prstGeom>
-          <a:noFill/>
-          <a:ln/>
-        </p:spPr>
-        <p:txBody>
-          <a:bodyPr wrap="square" lIns="0" tIns="0" rIns="0" bIns="0" rtlCol="0" anchor="t"/>
-          <a:lstStyle/>
-          <a:p>
-            <a:pPr indent="0" marL="0">
-              <a:buNone/>
-            </a:pPr>
-            <a:r>
-              <a:rPr lang="en-US" sz="950" dirty="0">
-                <a:solidFill>
-                  <a:srgbClr val="12181A"/>
-                </a:solidFill>
-                <a:latin typeface="Calibri" pitchFamily="34" charset="0"/>
-                <a:ea typeface="Calibri" pitchFamily="34" charset="-122"/>
-                <a:cs typeface="Calibri" pitchFamily="34" charset="-120"/>
-              </a:rPr>
-              <a:t>Log in to Procedure Composer.</a:t>
-            </a:r>
-            <a:endParaRPr lang="en-US" sz="950" dirty="0"/>
-          </a:p>
-        </p:txBody>
-      </p:sp>
-      <p:sp>
-        <p:nvSpPr>
-          <p:cNvPr id="19" name="Shape 17"/>
-          <p:cNvSpPr/>
-          <p:nvPr/>
-        </p:nvSpPr>
-        <p:spPr>
-          <a:xfrm>
-            <a:off x="4005072" y="2697480"/>
-            <a:ext cx="182880" cy="182880"/>
-          </a:xfrm>
-          <a:prstGeom prst="ellipse">
-            <a:avLst/>
-          </a:prstGeom>
-          <a:solidFill>
-            <a:srgbClr val="0B6E63"/>
-          </a:solidFill>
-          <a:ln/>
-        </p:spPr>
-      </p:sp>
-      <p:sp>
-        <p:nvSpPr>
-          <p:cNvPr id="20" name="Text 18"/>
-          <p:cNvSpPr/>
-          <p:nvPr/>
-        </p:nvSpPr>
-        <p:spPr>
-          <a:xfrm>
-            <a:off x="4005072" y="2697480"/>
-            <a:ext cx="182880" cy="182880"/>
-          </a:xfrm>
-          <a:prstGeom prst="rect">
-            <a:avLst/>
-          </a:prstGeom>
-          <a:noFill/>
-          <a:ln/>
-        </p:spPr>
-        <p:txBody>
-          <a:bodyPr wrap="square" lIns="0" tIns="0" rIns="0" bIns="0" rtlCol="0" anchor="ctr"/>
-          <a:lstStyle/>
-          <a:p>
-            <a:pPr algn="ctr" indent="0" marL="0">
-              <a:buNone/>
-            </a:pPr>
-            <a:r>
-              <a:rPr lang="en-US" sz="800" b="1" dirty="0">
-                <a:solidFill>
-                  <a:srgbClr val="F4FBFA"/>
-                </a:solidFill>
-                <a:latin typeface="Consolas" pitchFamily="34" charset="0"/>
-                <a:ea typeface="Consolas" pitchFamily="34" charset="-122"/>
-                <a:cs typeface="Consolas" pitchFamily="34" charset="-120"/>
-              </a:rPr>
-              <a:t>2</a:t>
-            </a:r>
-            <a:endParaRPr lang="en-US" sz="800" dirty="0"/>
-          </a:p>
-        </p:txBody>
-      </p:sp>
-      <p:sp>
-        <p:nvSpPr>
-          <p:cNvPr id="21" name="Text 19"/>
-          <p:cNvSpPr/>
-          <p:nvPr/>
-        </p:nvSpPr>
-        <p:spPr>
-          <a:xfrm>
-            <a:off x="4297680" y="2679192"/>
-            <a:ext cx="4224528" cy="292608"/>
-          </a:xfrm>
-          <a:prstGeom prst="rect">
-            <a:avLst/>
-          </a:prstGeom>
-          <a:noFill/>
-          <a:ln/>
-        </p:spPr>
-        <p:txBody>
-          <a:bodyPr wrap="square" lIns="0" tIns="0" rIns="0" bIns="0" rtlCol="0" anchor="t"/>
-          <a:lstStyle/>
-          <a:p>
-            <a:pPr indent="0" marL="0">
-              <a:buNone/>
-            </a:pPr>
-            <a:r>
-              <a:rPr lang="en-US" sz="950" dirty="0">
-                <a:solidFill>
-                  <a:srgbClr val="12181A"/>
-                </a:solidFill>
-                <a:latin typeface="Calibri" pitchFamily="34" charset="0"/>
-                <a:ea typeface="Calibri" pitchFamily="34" charset="-122"/>
-                <a:cs typeface="Calibri" pitchFamily="34" charset="-120"/>
-              </a:rPr>
-              <a:t>Click New Procedure.</a:t>
-            </a:r>
-            <a:endParaRPr lang="en-US" sz="950" dirty="0"/>
-          </a:p>
-        </p:txBody>
-      </p:sp>
-      <p:sp>
-        <p:nvSpPr>
-          <p:cNvPr id="22" name="Shape 20"/>
-          <p:cNvSpPr/>
-          <p:nvPr/>
-        </p:nvSpPr>
-        <p:spPr>
-          <a:xfrm>
-            <a:off x="4005072" y="2990088"/>
-            <a:ext cx="182880" cy="182880"/>
-          </a:xfrm>
-          <a:prstGeom prst="ellipse">
-            <a:avLst/>
-          </a:prstGeom>
-          <a:solidFill>
-            <a:srgbClr val="0B6E63"/>
-          </a:solidFill>
-          <a:ln/>
-        </p:spPr>
-      </p:sp>
-      <p:sp>
-        <p:nvSpPr>
-          <p:cNvPr id="23" name="Text 21"/>
-          <p:cNvSpPr/>
-          <p:nvPr/>
-        </p:nvSpPr>
-        <p:spPr>
-          <a:xfrm>
-            <a:off x="4005072" y="2990088"/>
-            <a:ext cx="182880" cy="182880"/>
-          </a:xfrm>
-          <a:prstGeom prst="rect">
-            <a:avLst/>
-          </a:prstGeom>
-          <a:noFill/>
-          <a:ln/>
-        </p:spPr>
-        <p:txBody>
-          <a:bodyPr wrap="square" lIns="0" tIns="0" rIns="0" bIns="0" rtlCol="0" anchor="ctr"/>
-          <a:lstStyle/>
-          <a:p>
-            <a:pPr algn="ctr" indent="0" marL="0">
-              <a:buNone/>
-            </a:pPr>
-            <a:r>
-              <a:rPr lang="en-US" sz="800" b="1" dirty="0">
-                <a:solidFill>
-                  <a:srgbClr val="F4FBFA"/>
-                </a:solidFill>
-                <a:latin typeface="Consolas" pitchFamily="34" charset="0"/>
-                <a:ea typeface="Consolas" pitchFamily="34" charset="-122"/>
-                <a:cs typeface="Consolas" pitchFamily="34" charset="-120"/>
-              </a:rPr>
-              <a:t>3</a:t>
-            </a:r>
-            <a:endParaRPr lang="en-US" sz="800" dirty="0"/>
-          </a:p>
-        </p:txBody>
-      </p:sp>
-      <p:sp>
-        <p:nvSpPr>
-          <p:cNvPr id="24" name="Text 22"/>
-          <p:cNvSpPr/>
-          <p:nvPr/>
-        </p:nvSpPr>
-        <p:spPr>
-          <a:xfrm>
-            <a:off x="4297680" y="2971800"/>
-            <a:ext cx="4224528" cy="292608"/>
-          </a:xfrm>
-          <a:prstGeom prst="rect">
-            <a:avLst/>
-          </a:prstGeom>
-          <a:noFill/>
-          <a:ln/>
-        </p:spPr>
-        <p:txBody>
-          <a:bodyPr wrap="square" lIns="0" tIns="0" rIns="0" bIns="0" rtlCol="0" anchor="t"/>
-          <a:lstStyle/>
-          <a:p>
-            <a:pPr indent="0" marL="0">
-              <a:buNone/>
-            </a:pPr>
-            <a:r>
-              <a:rPr lang="en-US" sz="950" dirty="0">
-                <a:solidFill>
-                  <a:srgbClr val="12181A"/>
-                </a:solidFill>
-                <a:latin typeface="Calibri" pitchFamily="34" charset="0"/>
-                <a:ea typeface="Calibri" pitchFamily="34" charset="-122"/>
-                <a:cs typeface="Calibri" pitchFamily="34" charset="-120"/>
-              </a:rPr>
-              <a:t>In the Title field, enter a title for the procedure.</a:t>
-            </a:r>
-            <a:endParaRPr lang="en-US" sz="950" dirty="0"/>
-          </a:p>
-        </p:txBody>
-      </p:sp>
-      <p:sp>
-        <p:nvSpPr>
-          <p:cNvPr id="25" name="Shape 23"/>
-          <p:cNvSpPr/>
-          <p:nvPr/>
-        </p:nvSpPr>
-        <p:spPr>
-          <a:xfrm>
-            <a:off x="4005072" y="3282696"/>
-            <a:ext cx="182880" cy="182880"/>
-          </a:xfrm>
-          <a:prstGeom prst="ellipse">
-            <a:avLst/>
-          </a:prstGeom>
-          <a:solidFill>
-            <a:srgbClr val="0B6E63"/>
-          </a:solidFill>
-          <a:ln/>
-        </p:spPr>
-      </p:sp>
-      <p:sp>
-        <p:nvSpPr>
-          <p:cNvPr id="26" name="Text 24"/>
-          <p:cNvSpPr/>
-          <p:nvPr/>
-        </p:nvSpPr>
-        <p:spPr>
-          <a:xfrm>
-            <a:off x="4005072" y="3282696"/>
-            <a:ext cx="182880" cy="182880"/>
-          </a:xfrm>
-          <a:prstGeom prst="rect">
-            <a:avLst/>
-          </a:prstGeom>
-          <a:noFill/>
-          <a:ln/>
-        </p:spPr>
-        <p:txBody>
-          <a:bodyPr wrap="square" lIns="0" tIns="0" rIns="0" bIns="0" rtlCol="0" anchor="ctr"/>
-          <a:lstStyle/>
-          <a:p>
-            <a:pPr algn="ctr" indent="0" marL="0">
-              <a:buNone/>
-            </a:pPr>
-            <a:r>
-              <a:rPr lang="en-US" sz="800" b="1" dirty="0">
-                <a:solidFill>
-                  <a:srgbClr val="F4FBFA"/>
-                </a:solidFill>
-                <a:latin typeface="Consolas" pitchFamily="34" charset="0"/>
-                <a:ea typeface="Consolas" pitchFamily="34" charset="-122"/>
-                <a:cs typeface="Consolas" pitchFamily="34" charset="-120"/>
-              </a:rPr>
-              <a:t>4</a:t>
-            </a:r>
-            <a:endParaRPr lang="en-US" sz="800" dirty="0"/>
-          </a:p>
-        </p:txBody>
-      </p:sp>
-      <p:sp>
-        <p:nvSpPr>
-          <p:cNvPr id="27" name="Text 25"/>
-          <p:cNvSpPr/>
-          <p:nvPr/>
-        </p:nvSpPr>
-        <p:spPr>
-          <a:xfrm>
-            <a:off x="4297680" y="3264408"/>
-            <a:ext cx="4224528" cy="292608"/>
-          </a:xfrm>
-          <a:prstGeom prst="rect">
-            <a:avLst/>
-          </a:prstGeom>
-          <a:noFill/>
-          <a:ln/>
-        </p:spPr>
-        <p:txBody>
-          <a:bodyPr wrap="square" lIns="0" tIns="0" rIns="0" bIns="0" rtlCol="0" anchor="t"/>
-          <a:lstStyle/>
-          <a:p>
-            <a:pPr indent="0" marL="0">
-              <a:buNone/>
-            </a:pPr>
-            <a:r>
-              <a:rPr lang="en-US" sz="950" dirty="0">
-                <a:solidFill>
-                  <a:srgbClr val="12181A"/>
-                </a:solidFill>
-                <a:latin typeface="Calibri" pitchFamily="34" charset="0"/>
-                <a:ea typeface="Calibri" pitchFamily="34" charset="-122"/>
-                <a:cs typeface="Calibri" pitchFamily="34" charset="-120"/>
-              </a:rPr>
-              <a:t>Optional. In the Labels field, add any labels that apply.</a:t>
-            </a:r>
-            <a:endParaRPr lang="en-US" sz="950" dirty="0"/>
-          </a:p>
-        </p:txBody>
-      </p:sp>
-      <p:sp>
-        <p:nvSpPr>
-          <p:cNvPr id="28" name="Shape 26"/>
-          <p:cNvSpPr/>
-          <p:nvPr/>
-        </p:nvSpPr>
-        <p:spPr>
-          <a:xfrm>
-            <a:off x="4005072" y="3575304"/>
-            <a:ext cx="182880" cy="182880"/>
-          </a:xfrm>
-          <a:prstGeom prst="ellipse">
-            <a:avLst/>
-          </a:prstGeom>
-          <a:solidFill>
-            <a:srgbClr val="0B6E63"/>
-          </a:solidFill>
-          <a:ln/>
-        </p:spPr>
-      </p:sp>
-      <p:sp>
-        <p:nvSpPr>
-          <p:cNvPr id="29" name="Text 27"/>
-          <p:cNvSpPr/>
-          <p:nvPr/>
-        </p:nvSpPr>
-        <p:spPr>
-          <a:xfrm>
-            <a:off x="4005072" y="3575304"/>
-            <a:ext cx="182880" cy="182880"/>
-          </a:xfrm>
-          <a:prstGeom prst="rect">
-            <a:avLst/>
-          </a:prstGeom>
-          <a:noFill/>
-          <a:ln/>
-        </p:spPr>
-        <p:txBody>
-          <a:bodyPr wrap="square" lIns="0" tIns="0" rIns="0" bIns="0" rtlCol="0" anchor="ctr"/>
-          <a:lstStyle/>
-          <a:p>
-            <a:pPr algn="ctr" indent="0" marL="0">
-              <a:buNone/>
-            </a:pPr>
-            <a:r>
-              <a:rPr lang="en-US" sz="800" b="1" dirty="0">
-                <a:solidFill>
-                  <a:srgbClr val="F4FBFA"/>
-                </a:solidFill>
-                <a:latin typeface="Consolas" pitchFamily="34" charset="0"/>
-                <a:ea typeface="Consolas" pitchFamily="34" charset="-122"/>
-                <a:cs typeface="Consolas" pitchFamily="34" charset="-120"/>
-              </a:rPr>
-              <a:t>5</a:t>
-            </a:r>
-            <a:endParaRPr lang="en-US" sz="800" dirty="0"/>
-          </a:p>
-        </p:txBody>
-      </p:sp>
-      <p:sp>
-        <p:nvSpPr>
-          <p:cNvPr id="30" name="Text 28"/>
-          <p:cNvSpPr/>
-          <p:nvPr/>
-        </p:nvSpPr>
-        <p:spPr>
-          <a:xfrm>
-            <a:off x="4297680" y="3557016"/>
-            <a:ext cx="4224528" cy="292608"/>
-          </a:xfrm>
-          <a:prstGeom prst="rect">
-            <a:avLst/>
-          </a:prstGeom>
-          <a:noFill/>
-          <a:ln/>
-        </p:spPr>
-        <p:txBody>
-          <a:bodyPr wrap="square" lIns="0" tIns="0" rIns="0" bIns="0" rtlCol="0" anchor="t"/>
-          <a:lstStyle/>
-          <a:p>
-            <a:pPr indent="0" marL="0">
-              <a:buNone/>
-            </a:pPr>
-            <a:r>
-              <a:rPr lang="en-US" sz="950" dirty="0">
-                <a:solidFill>
-                  <a:srgbClr val="12181A"/>
-                </a:solidFill>
-                <a:latin typeface="Calibri" pitchFamily="34" charset="0"/>
-                <a:ea typeface="Calibri" pitchFamily="34" charset="-122"/>
-                <a:cs typeface="Calibri" pitchFamily="34" charset="-120"/>
-              </a:rPr>
-              <a:t>Click Save.</a:t>
-            </a:r>
-            <a:endParaRPr lang="en-US" sz="950" dirty="0"/>
-          </a:p>
-        </p:txBody>
-      </p:sp>
-      <p:sp>
-        <p:nvSpPr>
-          <p:cNvPr id="31" name="Shape 29"/>
-          <p:cNvSpPr/>
-          <p:nvPr/>
-        </p:nvSpPr>
-        <p:spPr>
-          <a:xfrm>
-            <a:off x="4005072" y="3904488"/>
-            <a:ext cx="4517136" cy="457200"/>
-          </a:xfrm>
-          <a:prstGeom prst="roundRect">
-            <a:avLst>
-              <a:gd name="adj" fmla="val 10000"/>
-            </a:avLst>
-          </a:prstGeom>
-          <a:solidFill>
-            <a:srgbClr val="F3E3D0"/>
-          </a:solidFill>
-          <a:ln/>
-        </p:spPr>
-      </p:sp>
-      <p:sp>
-        <p:nvSpPr>
-          <p:cNvPr id="32" name="Text 30"/>
-          <p:cNvSpPr/>
-          <p:nvPr/>
-        </p:nvSpPr>
-        <p:spPr>
-          <a:xfrm>
-            <a:off x="4114800" y="3904488"/>
-            <a:ext cx="4297680" cy="457200"/>
-          </a:xfrm>
-          <a:prstGeom prst="rect">
-            <a:avLst/>
-          </a:prstGeom>
-          <a:noFill/>
-          <a:ln/>
-        </p:spPr>
-        <p:txBody>
-          <a:bodyPr wrap="square" lIns="0" tIns="0" rIns="0" bIns="0" rtlCol="0" anchor="ctr"/>
-          <a:lstStyle/>
-          <a:p>
-            <a:pPr indent="0" marL="0">
-              <a:buNone/>
-            </a:pPr>
-            <a:r>
-              <a:rPr lang="en-US" sz="850" i="1" dirty="0">
-                <a:solidFill>
-                  <a:srgbClr val="A9631E"/>
-                </a:solidFill>
-                <a:latin typeface="Calibri" pitchFamily="34" charset="0"/>
-                <a:ea typeface="Calibri" pitchFamily="34" charset="-122"/>
-                <a:cs typeface="Calibri" pitchFamily="34" charset="-120"/>
-              </a:rPr>
-              <a:t>Make sure your title begins with a gerund or infinitive verb.</a:t>
-            </a:r>
-            <a:endParaRPr lang="en-US" sz="850" dirty="0"/>
           </a:p>
         </p:txBody>
       </p:sp>
@@ -8897,6 +9027,7 @@
         <a:solidFill>
           <a:srgbClr val="F4F6F5"/>
         </a:solidFill>
+        <a:effectLst/>
       </p:bgPr>
     </p:bg>
     <p:spTree>
@@ -8934,11 +9065,11 @@
           <a:bodyPr wrap="square" lIns="0" tIns="0" rIns="0" bIns="0" rtlCol="0" anchor="ctr"/>
           <a:lstStyle/>
           <a:p>
-            <a:pPr indent="0" marL="0">
+            <a:pPr marL="0" indent="0">
               <a:buNone/>
             </a:pPr>
             <a:r>
-              <a:rPr lang="en-US" sz="900" spc="100" kern="0" dirty="0">
+              <a:rPr lang="en-US" sz="900" kern="0" spc="100" dirty="0">
                 <a:solidFill>
                   <a:srgbClr val="4B5559"/>
                 </a:solidFill>
@@ -8973,7 +9104,7 @@
           <a:bodyPr wrap="square" lIns="0" tIns="0" rIns="0" bIns="0" rtlCol="0" anchor="ctr"/>
           <a:lstStyle/>
           <a:p>
-            <a:pPr algn="r" indent="0" marL="0">
+            <a:pPr marL="0" indent="0" algn="r">
               <a:buNone/>
             </a:pPr>
             <a:r>
@@ -9012,11 +9143,11 @@
           <a:bodyPr wrap="square" lIns="0" tIns="0" rIns="0" bIns="0" rtlCol="0" anchor="ctr"/>
           <a:lstStyle/>
           <a:p>
-            <a:pPr indent="0" marL="0">
+            <a:pPr marL="0" indent="0">
               <a:buNone/>
             </a:pPr>
             <a:r>
-              <a:rPr lang="en-US" sz="1050" spc="150" kern="0" dirty="0">
+              <a:rPr lang="en-US" sz="1050" kern="0" spc="150" dirty="0">
                 <a:solidFill>
                   <a:srgbClr val="0B6E63"/>
                 </a:solidFill>
@@ -9051,7 +9182,7 @@
           <a:bodyPr wrap="square" lIns="0" tIns="0" rIns="0" bIns="0" rtlCol="0" anchor="t"/>
           <a:lstStyle/>
           <a:p>
-            <a:pPr algn="l" indent="0" marL="0">
+            <a:pPr marL="0" indent="0" algn="l">
               <a:buNone/>
             </a:pPr>
             <a:r>
@@ -9090,13 +9221,20 @@
           </a:solidFill>
           <a:ln/>
           <a:effectLst>
-            <a:outerShdw sx="100000" sy="100000" kx="0" ky="0" algn="bl" rotWithShape="0" blurRad="76200" dist="25400" dir="5400000">
+            <a:outerShdw blurRad="76200" dist="25400" dir="5400000" algn="bl" rotWithShape="0">
               <a:srgbClr val="12181A">
                 <a:alpha val="18000"/>
               </a:srgbClr>
             </a:outerShdw>
           </a:effectLst>
         </p:spPr>
+        <p:txBody>
+          <a:bodyPr/>
+          <a:lstStyle/>
+          <a:p>
+            <a:endParaRPr lang="en-US"/>
+          </a:p>
+        </p:txBody>
       </p:sp>
       <p:sp>
         <p:nvSpPr>
@@ -9117,6 +9255,13 @@
           </a:solidFill>
           <a:ln/>
         </p:spPr>
+        <p:txBody>
+          <a:bodyPr/>
+          <a:lstStyle/>
+          <a:p>
+            <a:endParaRPr lang="en-US"/>
+          </a:p>
+        </p:txBody>
       </p:sp>
       <p:sp>
         <p:nvSpPr>
@@ -9139,7 +9284,7 @@
           <a:bodyPr wrap="square" lIns="0" tIns="0" rIns="0" bIns="0" rtlCol="0" anchor="ctr"/>
           <a:lstStyle/>
           <a:p>
-            <a:pPr indent="0" marL="0">
+            <a:pPr marL="0" indent="0">
               <a:buNone/>
             </a:pPr>
             <a:r>
@@ -9328,13 +9473,20 @@
           </a:solidFill>
           <a:ln/>
           <a:effectLst>
-            <a:outerShdw sx="100000" sy="100000" kx="0" ky="0" algn="bl" rotWithShape="0" blurRad="76200" dist="25400" dir="5400000">
+            <a:outerShdw blurRad="76200" dist="25400" dir="5400000" algn="bl" rotWithShape="0">
               <a:srgbClr val="12181A">
                 <a:alpha val="18000"/>
               </a:srgbClr>
             </a:outerShdw>
           </a:effectLst>
         </p:spPr>
+        <p:txBody>
+          <a:bodyPr/>
+          <a:lstStyle/>
+          <a:p>
+            <a:endParaRPr lang="en-US"/>
+          </a:p>
+        </p:txBody>
       </p:sp>
       <p:sp>
         <p:nvSpPr>
@@ -9355,6 +9507,13 @@
           </a:solidFill>
           <a:ln/>
         </p:spPr>
+        <p:txBody>
+          <a:bodyPr/>
+          <a:lstStyle/>
+          <a:p>
+            <a:endParaRPr lang="en-US"/>
+          </a:p>
+        </p:txBody>
       </p:sp>
       <p:sp>
         <p:nvSpPr>
@@ -9377,7 +9536,7 @@
           <a:bodyPr wrap="square" lIns="0" tIns="0" rIns="0" bIns="0" rtlCol="0" anchor="ctr"/>
           <a:lstStyle/>
           <a:p>
-            <a:pPr indent="0" marL="0">
+            <a:pPr marL="0" indent="0">
               <a:buNone/>
             </a:pPr>
             <a:r>
@@ -9762,4 +9921,325 @@
     </a:ext>
   </a:extLst>
 </a:theme>
+</file>
+
+<file path=ppt/theme/theme2.xml><?xml version="1.0" encoding="utf-8"?>
+<a:theme xmlns:a="http://schemas.openxmlformats.org/drawingml/2006/main" name="Office Theme">
+  <a:themeElements>
+    <a:clrScheme name="Office">
+      <a:dk1>
+        <a:sysClr val="windowText" lastClr="000000"/>
+      </a:dk1>
+      <a:lt1>
+        <a:sysClr val="window" lastClr="FFFFFF"/>
+      </a:lt1>
+      <a:dk2>
+        <a:srgbClr val="0E2841"/>
+      </a:dk2>
+      <a:lt2>
+        <a:srgbClr val="E8E8E8"/>
+      </a:lt2>
+      <a:accent1>
+        <a:srgbClr val="156082"/>
+      </a:accent1>
+      <a:accent2>
+        <a:srgbClr val="E97132"/>
+      </a:accent2>
+      <a:accent3>
+        <a:srgbClr val="196B24"/>
+      </a:accent3>
+      <a:accent4>
+        <a:srgbClr val="0F9ED5"/>
+      </a:accent4>
+      <a:accent5>
+        <a:srgbClr val="A02B93"/>
+      </a:accent5>
+      <a:accent6>
+        <a:srgbClr val="4EA72E"/>
+      </a:accent6>
+      <a:hlink>
+        <a:srgbClr val="467886"/>
+      </a:hlink>
+      <a:folHlink>
+        <a:srgbClr val="96607D"/>
+      </a:folHlink>
+    </a:clrScheme>
+    <a:fontScheme name="Office">
+      <a:majorFont>
+        <a:latin typeface="Aptos Display" panose="02110004020202020204"/>
+        <a:ea typeface=""/>
+        <a:cs typeface=""/>
+        <a:font script="Jpan" typeface="游ゴシック Light"/>
+        <a:font script="Hang" typeface="맑은 고딕"/>
+        <a:font script="Hans" typeface="等线 Light"/>
+        <a:font script="Hant" typeface="新細明體"/>
+        <a:font script="Arab" typeface="Times New Roman"/>
+        <a:font script="Hebr" typeface="Times New Roman"/>
+        <a:font script="Thai" typeface="Angsana New"/>
+        <a:font script="Ethi" typeface="Nyala"/>
+        <a:font script="Beng" typeface="Vrinda"/>
+        <a:font script="Gujr" typeface="Shruti"/>
+        <a:font script="Khmr" typeface="MoolBoran"/>
+        <a:font script="Knda" typeface="Tunga"/>
+        <a:font script="Guru" typeface="Raavi"/>
+        <a:font script="Cans" typeface="Euphemia"/>
+        <a:font script="Cher" typeface="Plantagenet Cherokee"/>
+        <a:font script="Yiii" typeface="Microsoft Yi Baiti"/>
+        <a:font script="Tibt" typeface="Microsoft Himalaya"/>
+        <a:font script="Thaa" typeface="MV Boli"/>
+        <a:font script="Deva" typeface="Mangal"/>
+        <a:font script="Telu" typeface="Gautami"/>
+        <a:font script="Taml" typeface="Latha"/>
+        <a:font script="Syrc" typeface="Estrangelo Edessa"/>
+        <a:font script="Orya" typeface="Kalinga"/>
+        <a:font script="Mlym" typeface="Kartika"/>
+        <a:font script="Laoo" typeface="DokChampa"/>
+        <a:font script="Sinh" typeface="Iskoola Pota"/>
+        <a:font script="Mong" typeface="Mongolian Baiti"/>
+        <a:font script="Viet" typeface="Times New Roman"/>
+        <a:font script="Uigh" typeface="Microsoft Uighur"/>
+        <a:font script="Geor" typeface="Sylfaen"/>
+        <a:font script="Armn" typeface="Arial"/>
+        <a:font script="Bugi" typeface="Leelawadee UI"/>
+        <a:font script="Bopo" typeface="Microsoft JhengHei"/>
+        <a:font script="Java" typeface="Javanese Text"/>
+        <a:font script="Lisu" typeface="Segoe UI"/>
+        <a:font script="Mymr" typeface="Myanmar Text"/>
+        <a:font script="Nkoo" typeface="Ebrima"/>
+        <a:font script="Olck" typeface="Nirmala UI"/>
+        <a:font script="Osma" typeface="Ebrima"/>
+        <a:font script="Phag" typeface="Phagspa"/>
+        <a:font script="Syrn" typeface="Estrangelo Edessa"/>
+        <a:font script="Syrj" typeface="Estrangelo Edessa"/>
+        <a:font script="Syre" typeface="Estrangelo Edessa"/>
+        <a:font script="Sora" typeface="Nirmala UI"/>
+        <a:font script="Tale" typeface="Microsoft Tai Le"/>
+        <a:font script="Talu" typeface="Microsoft New Tai Lue"/>
+        <a:font script="Tfng" typeface="Ebrima"/>
+      </a:majorFont>
+      <a:minorFont>
+        <a:latin typeface="Aptos" panose="02110004020202020204"/>
+        <a:ea typeface=""/>
+        <a:cs typeface=""/>
+        <a:font script="Jpan" typeface="游ゴシック"/>
+        <a:font script="Hang" typeface="맑은 고딕"/>
+        <a:font script="Hans" typeface="等线"/>
+        <a:font script="Hant" typeface="新細明體"/>
+        <a:font script="Arab" typeface="Arial"/>
+        <a:font script="Hebr" typeface="Arial"/>
+        <a:font script="Thai" typeface="Cordia New"/>
+        <a:font script="Ethi" typeface="Nyala"/>
+        <a:font script="Beng" typeface="Vrinda"/>
+        <a:font script="Gujr" typeface="Shruti"/>
+        <a:font script="Khmr" typeface="DaunPenh"/>
+        <a:font script="Knda" typeface="Tunga"/>
+        <a:font script="Guru" typeface="Raavi"/>
+        <a:font script="Cans" typeface="Euphemia"/>
+        <a:font script="Cher" typeface="Plantagenet Cherokee"/>
+        <a:font script="Yiii" typeface="Microsoft Yi Baiti"/>
+        <a:font script="Tibt" typeface="Microsoft Himalaya"/>
+        <a:font script="Thaa" typeface="MV Boli"/>
+        <a:font script="Deva" typeface="Mangal"/>
+        <a:font script="Telu" typeface="Gautami"/>
+        <a:font script="Taml" typeface="Latha"/>
+        <a:font script="Syrc" typeface="Estrangelo Edessa"/>
+        <a:font script="Orya" typeface="Kalinga"/>
+        <a:font script="Mlym" typeface="Kartika"/>
+        <a:font script="Laoo" typeface="DokChampa"/>
+        <a:font script="Sinh" typeface="Iskoola Pota"/>
+        <a:font script="Mong" typeface="Mongolian Baiti"/>
+        <a:font script="Viet" typeface="Arial"/>
+        <a:font script="Uigh" typeface="Microsoft Uighur"/>
+        <a:font script="Geor" typeface="Sylfaen"/>
+        <a:font script="Armn" typeface="Arial"/>
+        <a:font script="Bugi" typeface="Leelawadee UI"/>
+        <a:font script="Bopo" typeface="Microsoft JhengHei"/>
+        <a:font script="Java" typeface="Javanese Text"/>
+        <a:font script="Lisu" typeface="Segoe UI"/>
+        <a:font script="Mymr" typeface="Myanmar Text"/>
+        <a:font script="Nkoo" typeface="Ebrima"/>
+        <a:font script="Olck" typeface="Nirmala UI"/>
+        <a:font script="Osma" typeface="Ebrima"/>
+        <a:font script="Phag" typeface="Phagspa"/>
+        <a:font script="Syrn" typeface="Estrangelo Edessa"/>
+        <a:font script="Syrj" typeface="Estrangelo Edessa"/>
+        <a:font script="Syre" typeface="Estrangelo Edessa"/>
+        <a:font script="Sora" typeface="Nirmala UI"/>
+        <a:font script="Tale" typeface="Microsoft Tai Le"/>
+        <a:font script="Talu" typeface="Microsoft New Tai Lue"/>
+        <a:font script="Tfng" typeface="Ebrima"/>
+      </a:minorFont>
+    </a:fontScheme>
+    <a:fmtScheme name="Office">
+      <a:fillStyleLst>
+        <a:solidFill>
+          <a:schemeClr val="phClr"/>
+        </a:solidFill>
+        <a:gradFill rotWithShape="1">
+          <a:gsLst>
+            <a:gs pos="0">
+              <a:schemeClr val="phClr">
+                <a:lumMod val="110000"/>
+                <a:satMod val="105000"/>
+                <a:tint val="67000"/>
+              </a:schemeClr>
+            </a:gs>
+            <a:gs pos="50000">
+              <a:schemeClr val="phClr">
+                <a:lumMod val="105000"/>
+                <a:satMod val="103000"/>
+                <a:tint val="73000"/>
+              </a:schemeClr>
+            </a:gs>
+            <a:gs pos="100000">
+              <a:schemeClr val="phClr">
+                <a:lumMod val="105000"/>
+                <a:satMod val="109000"/>
+                <a:tint val="81000"/>
+              </a:schemeClr>
+            </a:gs>
+          </a:gsLst>
+          <a:lin ang="5400000" scaled="0"/>
+        </a:gradFill>
+        <a:gradFill rotWithShape="1">
+          <a:gsLst>
+            <a:gs pos="0">
+              <a:schemeClr val="phClr">
+                <a:satMod val="103000"/>
+                <a:lumMod val="102000"/>
+                <a:tint val="94000"/>
+              </a:schemeClr>
+            </a:gs>
+            <a:gs pos="50000">
+              <a:schemeClr val="phClr">
+                <a:satMod val="110000"/>
+                <a:lumMod val="100000"/>
+                <a:shade val="100000"/>
+              </a:schemeClr>
+            </a:gs>
+            <a:gs pos="100000">
+              <a:schemeClr val="phClr">
+                <a:lumMod val="99000"/>
+                <a:satMod val="120000"/>
+                <a:shade val="78000"/>
+              </a:schemeClr>
+            </a:gs>
+          </a:gsLst>
+          <a:lin ang="5400000" scaled="0"/>
+        </a:gradFill>
+      </a:fillStyleLst>
+      <a:lnStyleLst>
+        <a:ln w="12700" cap="flat" cmpd="sng" algn="ctr">
+          <a:solidFill>
+            <a:schemeClr val="phClr"/>
+          </a:solidFill>
+          <a:prstDash val="solid"/>
+          <a:miter lim="800000"/>
+        </a:ln>
+        <a:ln w="19050" cap="flat" cmpd="sng" algn="ctr">
+          <a:solidFill>
+            <a:schemeClr val="phClr"/>
+          </a:solidFill>
+          <a:prstDash val="solid"/>
+          <a:miter lim="800000"/>
+        </a:ln>
+        <a:ln w="25400" cap="flat" cmpd="sng" algn="ctr">
+          <a:solidFill>
+            <a:schemeClr val="phClr"/>
+          </a:solidFill>
+          <a:prstDash val="solid"/>
+          <a:miter lim="800000"/>
+        </a:ln>
+      </a:lnStyleLst>
+      <a:effectStyleLst>
+        <a:effectStyle>
+          <a:effectLst/>
+        </a:effectStyle>
+        <a:effectStyle>
+          <a:effectLst/>
+        </a:effectStyle>
+        <a:effectStyle>
+          <a:effectLst>
+            <a:outerShdw blurRad="57150" dist="19050" dir="5400000" algn="ctr" rotWithShape="0">
+              <a:srgbClr val="000000">
+                <a:alpha val="63000"/>
+              </a:srgbClr>
+            </a:outerShdw>
+          </a:effectLst>
+        </a:effectStyle>
+      </a:effectStyleLst>
+      <a:bgFillStyleLst>
+        <a:solidFill>
+          <a:schemeClr val="phClr"/>
+        </a:solidFill>
+        <a:solidFill>
+          <a:schemeClr val="phClr">
+            <a:tint val="95000"/>
+            <a:satMod val="170000"/>
+          </a:schemeClr>
+        </a:solidFill>
+        <a:gradFill rotWithShape="1">
+          <a:gsLst>
+            <a:gs pos="0">
+              <a:schemeClr val="phClr">
+                <a:tint val="93000"/>
+                <a:satMod val="150000"/>
+                <a:shade val="98000"/>
+                <a:lumMod val="102000"/>
+              </a:schemeClr>
+            </a:gs>
+            <a:gs pos="50000">
+              <a:schemeClr val="phClr">
+                <a:tint val="98000"/>
+                <a:satMod val="130000"/>
+                <a:shade val="90000"/>
+                <a:lumMod val="103000"/>
+              </a:schemeClr>
+            </a:gs>
+            <a:gs pos="100000">
+              <a:schemeClr val="phClr">
+                <a:shade val="63000"/>
+                <a:satMod val="120000"/>
+              </a:schemeClr>
+            </a:gs>
+          </a:gsLst>
+          <a:lin ang="5400000" scaled="0"/>
+        </a:gradFill>
+      </a:bgFillStyleLst>
+    </a:fmtScheme>
+  </a:themeElements>
+  <a:objectDefaults>
+    <a:lnDef>
+      <a:spPr/>
+      <a:bodyPr/>
+      <a:lstStyle/>
+      <a:style>
+        <a:lnRef idx="2">
+          <a:schemeClr val="accent1"/>
+        </a:lnRef>
+        <a:fillRef idx="0">
+          <a:schemeClr val="accent1"/>
+        </a:fillRef>
+        <a:effectRef idx="1">
+          <a:schemeClr val="accent1"/>
+        </a:effectRef>
+        <a:fontRef idx="minor">
+          <a:schemeClr val="tx1"/>
+        </a:fontRef>
+      </a:style>
+    </a:lnDef>
+  </a:objectDefaults>
+  <a:extraClrSchemeLst/>
+  <a:extLst>
+    <a:ext uri="{05A4C25C-085E-4340-85A3-A5531E510DB2}">
+      <thm15:themeFamily xmlns:thm15="http://schemas.microsoft.com/office/thememl/2012/main" name="Office Theme" id="{2E142A2C-CD16-42D6-873A-C26D2A0506FA}" vid="{1BDDFF52-6CD6-40A5-AB3C-68EB2F1E4D0A}"/>
+    </a:ext>
+  </a:extLst>
+</a:theme>
+</file>
+
+<file path=docMetadata/LabelInfo.xml><?xml version="1.0" encoding="utf-8"?>
+<clbl:labelList xmlns:clbl="http://schemas.microsoft.com/office/2020/mipLabelMetadata">
+  <clbl:label id="{825c952f-1947-4719-99e7-7bc5a76060a8}" enabled="1" method="Standard" siteId="{4e2c6054-71cb-48f1-bd6c-3a9705aca71b}" contentBits="3" removed="0"/>
+</clbl:labelList>
 </file>